--- a/projects/SAP的AI Coding验证-数据版/最终文档/ppt_slides/slide_02.pptx
+++ b/projects/SAP的AI Coding验证-数据版/最终文档/ppt_slides/slide_02.pptx
@@ -105,109 +105,6 @@
     </a:lvl9pPr>
   </p:defaultTextStyle>
 </p:presentation>
-</file>
-
-<file path=ppt/charts/chart1.xml><?xml version="1.0" encoding="utf-8"?>
-<c:chartSpace xmlns:c="http://schemas.openxmlformats.org/drawingml/2006/chart" xmlns:a="http://schemas.openxmlformats.org/drawingml/2006/main" xmlns:r="http://schemas.openxmlformats.org/officeDocument/2006/relationships">
-  <c:date1904 val="0"/>
-  <c:roundedCorners val="0"/>
-  <c:chart>
-    <c:autoTitleDeleted val="0"/>
-    <c:plotArea>
-      <c:layout/>
-      <c:doughnutChart>
-        <c:varyColors val="1"/>
-        <c:ser>
-          <c:idx val="0"/>
-          <c:order val="0"/>
-          <c:tx>
-            <c:strRef>
-              <c:f>Sheet1!$B$1</c:f>
-              <c:strCache>
-                <c:ptCount val="1"/>
-                <c:pt idx="0">
-                  <c:v>Series 1</c:v>
-                </c:pt>
-              </c:strCache>
-            </c:strRef>
-          </c:tx>
-          <c:dPt>
-            <c:idx val="0"/>
-            <c:spPr>
-              <a:solidFill>
-                <a:srgbClr val="E53935"/>
-              </a:solidFill>
-            </c:spPr>
-          </c:dPt>
-          <c:dPt>
-            <c:idx val="1"/>
-            <c:spPr>
-              <a:solidFill>
-                <a:srgbClr val="B0BEC5"/>
-              </a:solidFill>
-            </c:spPr>
-          </c:dPt>
-          <c:cat>
-            <c:strRef>
-              <c:f>Sheet1!$A$2:$A$3</c:f>
-              <c:strCache>
-                <c:ptCount val="2"/>
-                <c:pt idx="0">
-                  <c:v>虚构字段</c:v>
-                </c:pt>
-                <c:pt idx="1">
-                  <c:v>真实字段</c:v>
-                </c:pt>
-              </c:strCache>
-            </c:strRef>
-          </c:cat>
-          <c:val>
-            <c:numRef>
-              <c:f>Sheet1!$B$2:$B$3</c:f>
-              <c:numCache>
-                <c:formatCode>General</c:formatCode>
-                <c:ptCount val="2"/>
-                <c:pt idx="0">
-                  <c:v>50</c:v>
-                </c:pt>
-                <c:pt idx="1">
-                  <c:v>50</c:v>
-                </c:pt>
-              </c:numCache>
-            </c:numRef>
-          </c:val>
-        </c:ser>
-        <c:dLbls>
-          <c:showLegendKey val="0"/>
-          <c:showVal val="0"/>
-          <c:showCatName val="0"/>
-          <c:showSerName val="0"/>
-          <c:showPercent val="0"/>
-          <c:showBubbleSize val="0"/>
-          <c:showLeaderLines val="1"/>
-        </c:dLbls>
-        <c:firstSliceAng val="0"/>
-        <c:holeSize val="50"/>
-      </c:doughnutChart>
-    </c:plotArea>
-    <c:plotVisOnly val="1"/>
-    <c:dispBlanksAs val="gap"/>
-    <c:showDLblsOverMax val="0"/>
-  </c:chart>
-  <c:txPr>
-    <a:bodyPr/>
-    <a:lstStyle/>
-    <a:p>
-      <a:pPr>
-        <a:defRPr sz="1800"/>
-      </a:pPr>
-      <a:endParaRPr/>
-    </a:p>
-  </c:txPr>
-  <c:externalData r:id="rId1">
-    <c:autoUpdate val="0"/>
-  </c:externalData>
-</c:chartSpace>
 </file>
 
 <file path=ppt/slideLayouts/slideLayout1.xml><?xml version="1.0" encoding="utf-8"?>
@@ -3200,13 +3097,13 @@
         <p:spPr>
           <a:xfrm>
             <a:off x="0" y="0"/>
-            <a:ext cx="12191695" cy="1097280"/>
+            <a:ext cx="12191695" cy="6858000"/>
           </a:xfrm>
           <a:prstGeom prst="rect">
             <a:avLst/>
           </a:prstGeom>
           <a:solidFill>
-            <a:srgbClr val="1D3B6C"/>
+            <a:srgbClr val="EBEFF2"/>
           </a:solidFill>
           <a:ln>
             <a:noFill/>
@@ -3242,14 +3139,14 @@
         </p:nvSpPr>
         <p:spPr>
           <a:xfrm>
-            <a:off x="457200" y="182880"/>
-            <a:ext cx="731520" cy="365760"/>
+            <a:off x="0" y="0"/>
+            <a:ext cx="12191695" cy="685800"/>
           </a:xfrm>
           <a:prstGeom prst="rect">
             <a:avLst/>
           </a:prstGeom>
           <a:solidFill>
-            <a:srgbClr val="3A5A8C"/>
+            <a:srgbClr val="1B365D"/>
           </a:solidFill>
           <a:ln>
             <a:noFill/>
@@ -3270,46 +3167,11 @@
           </a:fontRef>
         </p:style>
         <p:txBody>
-          <a:bodyPr rtlCol="0" anchor="ctr"/>
+          <a:bodyPr rtlCol="0" anchor="ctr" wrap="square" lIns="548640" tIns="73152"/>
           <a:lstStyle/>
           <a:p>
             <a:pPr algn="ctr">
-              <a:defRPr sz="1800" b="1">
-                <a:solidFill>
-                  <a:srgbClr val="FFFFFF"/>
-                </a:solidFill>
-              </a:defRPr>
-            </a:pPr>
-            <a:r>
-              <a:t>中等</a:t>
-            </a:r>
-          </a:p>
-        </p:txBody>
-      </p:sp>
-      <p:sp>
-        <p:nvSpPr>
-          <p:cNvPr id="4" name="TextBox 3"/>
-          <p:cNvSpPr txBox="1"/>
-          <p:nvPr/>
-        </p:nvSpPr>
-        <p:spPr>
-          <a:xfrm>
-            <a:off x="1280160" y="137160"/>
-            <a:ext cx="9144000" cy="457200"/>
-          </a:xfrm>
-          <a:prstGeom prst="rect">
-            <a:avLst/>
-          </a:prstGeom>
-          <a:noFill/>
-        </p:spPr>
-        <p:txBody>
-          <a:bodyPr wrap="none">
-            <a:spAutoFit/>
-          </a:bodyPr>
-          <a:lstStyle/>
-          <a:p>
-            <a:pPr>
-              <a:defRPr sz="2400" b="1">
+              <a:defRPr sz="2600" b="1">
                 <a:solidFill>
                   <a:srgbClr val="FFFFFF"/>
                 </a:solidFill>
@@ -3317,485 +3179,21 @@
               </a:defRPr>
             </a:pPr>
             <a:r>
-              <a:t>中等难度：数据字典“幻觉”导致代码不可用</a:t>
-            </a:r>
-          </a:p>
-        </p:txBody>
-      </p:sp>
-      <p:sp>
-        <p:nvSpPr>
-          <p:cNvPr id="5" name="TextBox 4"/>
-          <p:cNvSpPr txBox="1"/>
-          <p:nvPr/>
-        </p:nvSpPr>
-        <p:spPr>
-          <a:xfrm>
-            <a:off x="457200" y="640080"/>
-            <a:ext cx="9144000" cy="365760"/>
-          </a:xfrm>
-          <a:prstGeom prst="rect">
-            <a:avLst/>
-          </a:prstGeom>
-          <a:noFill/>
-        </p:spPr>
-        <p:txBody>
-          <a:bodyPr wrap="none">
-            <a:spAutoFit/>
-          </a:bodyPr>
-          <a:lstStyle/>
-          <a:p>
-            <a:pPr>
-              <a:defRPr sz="1400">
-                <a:solidFill>
-                  <a:srgbClr val="FFFFFF"/>
-                </a:solidFill>
-                <a:latin typeface="Microsoft YaHei"/>
-              </a:defRPr>
-            </a:pPr>
-            <a:r>
-              <a:t>案例B —— 采购配额维护 (中等复杂度验证)</a:t>
-            </a:r>
-          </a:p>
-        </p:txBody>
-      </p:sp>
-      <p:sp>
-        <p:nvSpPr>
-          <p:cNvPr id="6" name="Rounded Rectangle 5"/>
+              <a:t>SAP ABAP AI 效率测评报告</a:t>
+            </a:r>
+          </a:p>
+        </p:txBody>
+      </p:sp>
+      <p:sp>
+        <p:nvSpPr>
+          <p:cNvPr id="4" name="Rounded Rectangle 3"/>
           <p:cNvSpPr/>
           <p:nvPr/>
         </p:nvSpPr>
         <p:spPr>
           <a:xfrm>
-            <a:off x="457200" y="1371600"/>
-            <a:ext cx="438912" cy="438912"/>
-          </a:xfrm>
-          <a:prstGeom prst="roundRect">
-            <a:avLst>
-              <a:gd name="adj" fmla="val 25000"/>
-            </a:avLst>
-          </a:prstGeom>
-          <a:solidFill>
-            <a:srgbClr val="E3E8ED"/>
-          </a:solidFill>
-          <a:ln>
-            <a:noFill/>
-          </a:ln>
-        </p:spPr>
-        <p:style>
-          <a:lnRef idx="1">
-            <a:schemeClr val="accent1"/>
-          </a:lnRef>
-          <a:fillRef idx="3">
-            <a:schemeClr val="accent1"/>
-          </a:fillRef>
-          <a:effectRef idx="2">
-            <a:schemeClr val="accent1"/>
-          </a:effectRef>
-          <a:fontRef idx="minor">
-            <a:schemeClr val="lt1"/>
-          </a:fontRef>
-        </p:style>
-        <p:txBody>
-          <a:bodyPr rtlCol="0" anchor="ctr" lIns="0" rIns="0" tIns="0" bIns="0"/>
-          <a:lstStyle/>
-          <a:p>
-            <a:pPr algn="ctr">
-              <a:defRPr sz="1800" b="0">
-                <a:solidFill>
-                  <a:srgbClr val="546E7A"/>
-                </a:solidFill>
-              </a:defRPr>
-            </a:pPr>
-            <a:r>
-              <a:t>🧠</a:t>
-            </a:r>
-          </a:p>
-        </p:txBody>
-      </p:sp>
-      <p:sp>
-        <p:nvSpPr>
-          <p:cNvPr id="7" name="TextBox 6"/>
-          <p:cNvSpPr txBox="1"/>
-          <p:nvPr/>
-        </p:nvSpPr>
-        <p:spPr>
-          <a:xfrm>
-            <a:off x="1051560" y="1353312"/>
-            <a:ext cx="5486400" cy="594360"/>
-          </a:xfrm>
-          <a:prstGeom prst="rect">
-            <a:avLst/>
-          </a:prstGeom>
-          <a:noFill/>
-        </p:spPr>
-        <p:txBody>
-          <a:bodyPr wrap="square">
-            <a:spAutoFit/>
-          </a:bodyPr>
-          <a:lstStyle/>
-          <a:p>
-            <a:r>
-              <a:rPr sz="1400" b="1">
-                <a:solidFill>
-                  <a:srgbClr val="333333"/>
-                </a:solidFill>
-                <a:latin typeface="Microsoft YaHei"/>
-              </a:rPr>
-              <a:t>业务理解偏差：：</a:t>
-            </a:r>
-            <a:r>
-              <a:rPr sz="1300" b="0">
-                <a:solidFill>
-                  <a:srgbClr val="555555"/>
-                </a:solidFill>
-                <a:latin typeface="Microsoft YaHei"/>
-              </a:rPr>
-              <a:t>Copilot 完全混淆采购配额与货源概念，导致核心数据模型错误。</a:t>
-            </a:r>
-          </a:p>
-        </p:txBody>
-      </p:sp>
-      <p:sp>
-        <p:nvSpPr>
-          <p:cNvPr id="8" name="Rounded Rectangle 7"/>
-          <p:cNvSpPr/>
-          <p:nvPr/>
-        </p:nvSpPr>
-        <p:spPr>
-          <a:xfrm>
-            <a:off x="457200" y="2651760"/>
-            <a:ext cx="438912" cy="438912"/>
-          </a:xfrm>
-          <a:prstGeom prst="roundRect">
-            <a:avLst>
-              <a:gd name="adj" fmla="val 25000"/>
-            </a:avLst>
-          </a:prstGeom>
-          <a:solidFill>
-            <a:srgbClr val="E3E8ED"/>
-          </a:solidFill>
-          <a:ln>
-            <a:noFill/>
-          </a:ln>
-        </p:spPr>
-        <p:style>
-          <a:lnRef idx="1">
-            <a:schemeClr val="accent1"/>
-          </a:lnRef>
-          <a:fillRef idx="3">
-            <a:schemeClr val="accent1"/>
-          </a:fillRef>
-          <a:effectRef idx="2">
-            <a:schemeClr val="accent1"/>
-          </a:effectRef>
-          <a:fontRef idx="minor">
-            <a:schemeClr val="lt1"/>
-          </a:fontRef>
-        </p:style>
-        <p:txBody>
-          <a:bodyPr rtlCol="0" anchor="ctr" lIns="0" rIns="0" tIns="0" bIns="0"/>
-          <a:lstStyle/>
-          <a:p>
-            <a:pPr algn="ctr">
-              <a:defRPr sz="1800" b="0">
-                <a:solidFill>
-                  <a:srgbClr val="546E7A"/>
-                </a:solidFill>
-              </a:defRPr>
-            </a:pPr>
-            <a:r>
-              <a:t>⚠️</a:t>
-            </a:r>
-          </a:p>
-        </p:txBody>
-      </p:sp>
-      <p:sp>
-        <p:nvSpPr>
-          <p:cNvPr id="9" name="TextBox 8"/>
-          <p:cNvSpPr txBox="1"/>
-          <p:nvPr/>
-        </p:nvSpPr>
-        <p:spPr>
-          <a:xfrm>
-            <a:off x="1051560" y="2633472"/>
-            <a:ext cx="5486400" cy="594360"/>
-          </a:xfrm>
-          <a:prstGeom prst="rect">
-            <a:avLst/>
-          </a:prstGeom>
-          <a:noFill/>
-        </p:spPr>
-        <p:txBody>
-          <a:bodyPr wrap="square">
-            <a:spAutoFit/>
-          </a:bodyPr>
-          <a:lstStyle/>
-          <a:p>
-            <a:r>
-              <a:rPr sz="1400" b="1">
-                <a:solidFill>
-                  <a:srgbClr val="333333"/>
-                </a:solidFill>
-                <a:latin typeface="Microsoft YaHei"/>
-              </a:rPr>
-              <a:t>虚构字段危机：：</a:t>
-            </a:r>
-            <a:r>
-              <a:rPr sz="1300" b="0">
-                <a:solidFill>
-                  <a:srgbClr val="555555"/>
-                </a:solidFill>
-                <a:latin typeface="Microsoft YaHei"/>
-              </a:rPr>
-              <a:t>Claude Code 虚构字段占比高达 50%，直接引发 21 个连锁语法错误。</a:t>
-            </a:r>
-          </a:p>
-        </p:txBody>
-      </p:sp>
-      <p:sp>
-        <p:nvSpPr>
-          <p:cNvPr id="10" name="TextBox 9"/>
-          <p:cNvSpPr txBox="1"/>
-          <p:nvPr/>
-        </p:nvSpPr>
-        <p:spPr>
-          <a:xfrm>
-            <a:off x="4572000" y="2926080"/>
-            <a:ext cx="1371600" cy="365760"/>
-          </a:xfrm>
-          <a:prstGeom prst="rect">
-            <a:avLst/>
-          </a:prstGeom>
-          <a:noFill/>
-        </p:spPr>
-        <p:txBody>
-          <a:bodyPr wrap="none">
-            <a:spAutoFit/>
-          </a:bodyPr>
-          <a:lstStyle/>
-          <a:p>
-            <a:pPr algn="ctr">
-              <a:defRPr sz="1000" b="1">
-                <a:solidFill>
-                  <a:srgbClr val="E53935"/>
-                </a:solidFill>
-              </a:defRPr>
-            </a:pPr>
-            <a:r>
-              <a:t>50%</a:t>
-            </a:r>
-          </a:p>
-          <a:p>
-            <a:r>
-              <a:t>虚构字段占比 ⚠️</a:t>
-            </a:r>
-          </a:p>
-        </p:txBody>
-      </p:sp>
-      <p:sp>
-        <p:nvSpPr>
-          <p:cNvPr id="11" name="Rounded Rectangle 10"/>
-          <p:cNvSpPr/>
-          <p:nvPr/>
-        </p:nvSpPr>
-        <p:spPr>
-          <a:xfrm>
-            <a:off x="457200" y="3931920"/>
-            <a:ext cx="438912" cy="438912"/>
-          </a:xfrm>
-          <a:prstGeom prst="roundRect">
-            <a:avLst>
-              <a:gd name="adj" fmla="val 25000"/>
-            </a:avLst>
-          </a:prstGeom>
-          <a:solidFill>
-            <a:srgbClr val="E3E8ED"/>
-          </a:solidFill>
-          <a:ln>
-            <a:noFill/>
-          </a:ln>
-        </p:spPr>
-        <p:style>
-          <a:lnRef idx="1">
-            <a:schemeClr val="accent1"/>
-          </a:lnRef>
-          <a:fillRef idx="3">
-            <a:schemeClr val="accent1"/>
-          </a:fillRef>
-          <a:effectRef idx="2">
-            <a:schemeClr val="accent1"/>
-          </a:effectRef>
-          <a:fontRef idx="minor">
-            <a:schemeClr val="lt1"/>
-          </a:fontRef>
-        </p:style>
-        <p:txBody>
-          <a:bodyPr rtlCol="0" anchor="ctr" lIns="0" rIns="0" tIns="0" bIns="0"/>
-          <a:lstStyle/>
-          <a:p>
-            <a:pPr algn="ctr">
-              <a:defRPr sz="1800" b="0">
-                <a:solidFill>
-                  <a:srgbClr val="546E7A"/>
-                </a:solidFill>
-              </a:defRPr>
-            </a:pPr>
-            <a:r>
-              <a:t>🔗</a:t>
-            </a:r>
-          </a:p>
-        </p:txBody>
-      </p:sp>
-      <p:sp>
-        <p:nvSpPr>
-          <p:cNvPr id="12" name="TextBox 11"/>
-          <p:cNvSpPr txBox="1"/>
-          <p:nvPr/>
-        </p:nvSpPr>
-        <p:spPr>
-          <a:xfrm>
-            <a:off x="1051560" y="3913632"/>
-            <a:ext cx="5486400" cy="594360"/>
-          </a:xfrm>
-          <a:prstGeom prst="rect">
-            <a:avLst/>
-          </a:prstGeom>
-          <a:noFill/>
-        </p:spPr>
-        <p:txBody>
-          <a:bodyPr wrap="square">
-            <a:spAutoFit/>
-          </a:bodyPr>
-          <a:lstStyle/>
-          <a:p>
-            <a:r>
-              <a:rPr sz="1400" b="1">
-                <a:solidFill>
-                  <a:srgbClr val="333333"/>
-                </a:solidFill>
-                <a:latin typeface="Microsoft YaHei"/>
-              </a:rPr>
-              <a:t>接口规范缺失：：</a:t>
-            </a:r>
-            <a:r>
-              <a:rPr sz="1300" b="0">
-                <a:solidFill>
-                  <a:srgbClr val="555555"/>
-                </a:solidFill>
-                <a:latin typeface="Microsoft YaHei"/>
-              </a:rPr>
-              <a:t>AI 无法正确识别 SAP 函数模块 (FM) 接口仅接受 DDIC 类型的规则。</a:t>
-            </a:r>
-          </a:p>
-        </p:txBody>
-      </p:sp>
-      <p:sp>
-        <p:nvSpPr>
-          <p:cNvPr id="13" name="Rounded Rectangle 12"/>
-          <p:cNvSpPr/>
-          <p:nvPr/>
-        </p:nvSpPr>
-        <p:spPr>
-          <a:xfrm>
-            <a:off x="457200" y="5212080"/>
-            <a:ext cx="438912" cy="438912"/>
-          </a:xfrm>
-          <a:prstGeom prst="roundRect">
-            <a:avLst>
-              <a:gd name="adj" fmla="val 25000"/>
-            </a:avLst>
-          </a:prstGeom>
-          <a:solidFill>
-            <a:srgbClr val="E3E8ED"/>
-          </a:solidFill>
-          <a:ln>
-            <a:noFill/>
-          </a:ln>
-        </p:spPr>
-        <p:style>
-          <a:lnRef idx="1">
-            <a:schemeClr val="accent1"/>
-          </a:lnRef>
-          <a:fillRef idx="3">
-            <a:schemeClr val="accent1"/>
-          </a:fillRef>
-          <a:effectRef idx="2">
-            <a:schemeClr val="accent1"/>
-          </a:effectRef>
-          <a:fontRef idx="minor">
-            <a:schemeClr val="lt1"/>
-          </a:fontRef>
-        </p:style>
-        <p:txBody>
-          <a:bodyPr rtlCol="0" anchor="ctr" lIns="0" rIns="0" tIns="0" bIns="0"/>
-          <a:lstStyle/>
-          <a:p>
-            <a:pPr algn="ctr">
-              <a:defRPr sz="1800" b="0">
-                <a:solidFill>
-                  <a:srgbClr val="546E7A"/>
-                </a:solidFill>
-              </a:defRPr>
-            </a:pPr>
-            <a:r>
-              <a:t>🧰</a:t>
-            </a:r>
-          </a:p>
-        </p:txBody>
-      </p:sp>
-      <p:sp>
-        <p:nvSpPr>
-          <p:cNvPr id="14" name="TextBox 13"/>
-          <p:cNvSpPr txBox="1"/>
-          <p:nvPr/>
-        </p:nvSpPr>
-        <p:spPr>
-          <a:xfrm>
-            <a:off x="1051560" y="5193792"/>
-            <a:ext cx="5486400" cy="594360"/>
-          </a:xfrm>
-          <a:prstGeom prst="rect">
-            <a:avLst/>
-          </a:prstGeom>
-          <a:noFill/>
-        </p:spPr>
-        <p:txBody>
-          <a:bodyPr wrap="square">
-            <a:spAutoFit/>
-          </a:bodyPr>
-          <a:lstStyle/>
-          <a:p>
-            <a:r>
-              <a:rPr sz="1400" b="1">
-                <a:solidFill>
-                  <a:srgbClr val="333333"/>
-                </a:solidFill>
-                <a:latin typeface="Microsoft YaHei"/>
-              </a:rPr>
-              <a:t>修复成本极高：：</a:t>
-            </a:r>
-            <a:r>
-              <a:rPr sz="1300" b="0">
-                <a:solidFill>
-                  <a:srgbClr val="555555"/>
-                </a:solidFill>
-                <a:latin typeface="Microsoft YaHei"/>
-              </a:rPr>
-              <a:t>由于虚构字段与逻辑错误交织，AI 生成代码的修复成本远超重写成本。</a:t>
-            </a:r>
-          </a:p>
-        </p:txBody>
-      </p:sp>
-      <p:sp>
-        <p:nvSpPr>
-          <p:cNvPr id="15" name="Rounded Rectangle 14"/>
-          <p:cNvSpPr/>
-          <p:nvPr/>
-        </p:nvSpPr>
-        <p:spPr>
-          <a:xfrm>
-            <a:off x="6217920" y="1280160"/>
-            <a:ext cx="5486400" cy="2011680"/>
+            <a:off x="365760" y="731520"/>
+            <a:ext cx="11460175" cy="5852160"/>
           </a:xfrm>
           <a:prstGeom prst="roundRect">
             <a:avLst/>
@@ -3803,9 +3201,9 @@
           <a:solidFill>
             <a:srgbClr val="FFFFFF"/>
           </a:solidFill>
-          <a:ln w="12700">
+          <a:ln>
             <a:solidFill>
-              <a:srgbClr val="E0E0E0"/>
+              <a:srgbClr val="DDDDDD"/>
             </a:solidFill>
           </a:ln>
         </p:spPr>
@@ -3833,25 +3231,316 @@
       </p:sp>
       <p:sp>
         <p:nvSpPr>
-          <p:cNvPr id="16" name="Isosceles Triangle 15"/>
+          <p:cNvPr id="5" name="TextBox 4"/>
+          <p:cNvSpPr txBox="1"/>
+          <p:nvPr/>
+        </p:nvSpPr>
+        <p:spPr>
+          <a:xfrm>
+            <a:off x="731520" y="914400"/>
+            <a:ext cx="9144000" cy="731520"/>
+          </a:xfrm>
+          <a:prstGeom prst="rect">
+            <a:avLst/>
+          </a:prstGeom>
+          <a:noFill/>
+        </p:spPr>
+        <p:txBody>
+          <a:bodyPr wrap="none">
+            <a:spAutoFit/>
+          </a:bodyPr>
+          <a:lstStyle/>
+          <a:p>
+            <a:pPr>
+              <a:defRPr sz="3200" b="1">
+                <a:solidFill>
+                  <a:srgbClr val="1B365D"/>
+                </a:solidFill>
+              </a:defRPr>
+            </a:pPr>
+            <a:r>
+              <a:t>第2页 中等复杂度：深陷“虚构字段”泥潭</a:t>
+            </a:r>
+          </a:p>
+        </p:txBody>
+      </p:sp>
+      <p:sp>
+        <p:nvSpPr>
+          <p:cNvPr id="6" name="TextBox 5"/>
+          <p:cNvSpPr txBox="1"/>
+          <p:nvPr/>
+        </p:nvSpPr>
+        <p:spPr>
+          <a:xfrm>
+            <a:off x="731520" y="1463040"/>
+            <a:ext cx="9144000" cy="457200"/>
+          </a:xfrm>
+          <a:prstGeom prst="rect">
+            <a:avLst/>
+          </a:prstGeom>
+          <a:noFill/>
+        </p:spPr>
+        <p:txBody>
+          <a:bodyPr wrap="none">
+            <a:spAutoFit/>
+          </a:bodyPr>
+          <a:lstStyle/>
+          <a:p>
+            <a:pPr>
+              <a:defRPr sz="2000" b="1">
+                <a:solidFill>
+                  <a:srgbClr val="555555"/>
+                </a:solidFill>
+              </a:defRPr>
+            </a:pPr>
+            <a:r>
+              <a:t>案例B - 采购配额维护（中等复杂度）验证</a:t>
+            </a:r>
+          </a:p>
+        </p:txBody>
+      </p:sp>
+      <p:sp>
+        <p:nvSpPr>
+          <p:cNvPr id="7" name="TextBox 6"/>
+          <p:cNvSpPr txBox="1"/>
+          <p:nvPr/>
+        </p:nvSpPr>
+        <p:spPr>
+          <a:xfrm>
+            <a:off x="731520" y="2194560"/>
+            <a:ext cx="731520" cy="731520"/>
+          </a:xfrm>
+          <a:prstGeom prst="rect">
+            <a:avLst/>
+          </a:prstGeom>
+          <a:noFill/>
+        </p:spPr>
+        <p:txBody>
+          <a:bodyPr wrap="none">
+            <a:spAutoFit/>
+          </a:bodyPr>
+          <a:lstStyle/>
+          <a:p>
+            <a:pPr>
+              <a:defRPr sz="3200"/>
+            </a:pPr>
+          </a:p>
+        </p:txBody>
+      </p:sp>
+      <p:sp>
+        <p:nvSpPr>
+          <p:cNvPr id="8" name="TextBox 7"/>
+          <p:cNvSpPr txBox="1"/>
+          <p:nvPr/>
+        </p:nvSpPr>
+        <p:spPr>
+          <a:xfrm>
+            <a:off x="1645920" y="2103120"/>
+            <a:ext cx="3657600" cy="365760"/>
+          </a:xfrm>
+          <a:prstGeom prst="rect">
+            <a:avLst/>
+          </a:prstGeom>
+          <a:noFill/>
+        </p:spPr>
+        <p:txBody>
+          <a:bodyPr wrap="none">
+            <a:spAutoFit/>
+          </a:bodyPr>
+          <a:lstStyle/>
+          <a:p>
+            <a:pPr>
+              <a:defRPr sz="2000" b="1"/>
+            </a:pPr>
+            <a:r>
+              <a:t>业务理解偏差</a:t>
+            </a:r>
+          </a:p>
+        </p:txBody>
+      </p:sp>
+      <p:sp>
+        <p:nvSpPr>
+          <p:cNvPr id="9" name="TextBox 8"/>
+          <p:cNvSpPr txBox="1"/>
+          <p:nvPr/>
+        </p:nvSpPr>
+        <p:spPr>
+          <a:xfrm>
+            <a:off x="1645920" y="2468880"/>
+            <a:ext cx="4114800" cy="914400"/>
+          </a:xfrm>
+          <a:prstGeom prst="rect">
+            <a:avLst/>
+          </a:prstGeom>
+          <a:noFill/>
+        </p:spPr>
+        <p:txBody>
+          <a:bodyPr wrap="square">
+            <a:spAutoFit/>
+          </a:bodyPr>
+          <a:lstStyle/>
+          <a:p>
+            <a:pPr>
+              <a:defRPr sz="1400"/>
+            </a:pPr>
+            <a:r>
+              <a:t>• Copilot 完全混淆“配额”与“货源”概念。</a:t>
+            </a:r>
+          </a:p>
+          <a:p>
+            <a:pPr>
+              <a:defRPr sz="1400"/>
+            </a:pPr>
+            <a:r>
+              <a:t> 数据模型从底层开始错误，导致逻辑无法构建。</a:t>
+            </a:r>
+          </a:p>
+        </p:txBody>
+      </p:sp>
+      <p:sp>
+        <p:nvSpPr>
+          <p:cNvPr id="10" name="TextBox 9"/>
+          <p:cNvSpPr txBox="1"/>
+          <p:nvPr/>
+        </p:nvSpPr>
+        <p:spPr>
+          <a:xfrm>
+            <a:off x="731520" y="3474720"/>
+            <a:ext cx="731520" cy="731520"/>
+          </a:xfrm>
+          <a:prstGeom prst="rect">
+            <a:avLst/>
+          </a:prstGeom>
+          <a:noFill/>
+        </p:spPr>
+        <p:txBody>
+          <a:bodyPr wrap="none">
+            <a:spAutoFit/>
+          </a:bodyPr>
+          <a:lstStyle/>
+          <a:p>
+            <a:pPr>
+              <a:defRPr sz="3200"/>
+            </a:pPr>
+          </a:p>
+        </p:txBody>
+      </p:sp>
+      <p:sp>
+        <p:nvSpPr>
+          <p:cNvPr id="11" name="TextBox 10"/>
+          <p:cNvSpPr txBox="1"/>
+          <p:nvPr/>
+        </p:nvSpPr>
+        <p:spPr>
+          <a:xfrm>
+            <a:off x="1645920" y="3383280"/>
+            <a:ext cx="3657600" cy="365760"/>
+          </a:xfrm>
+          <a:prstGeom prst="rect">
+            <a:avLst/>
+          </a:prstGeom>
+          <a:noFill/>
+        </p:spPr>
+        <p:txBody>
+          <a:bodyPr wrap="none">
+            <a:spAutoFit/>
+          </a:bodyPr>
+          <a:lstStyle/>
+          <a:p>
+            <a:pPr>
+              <a:defRPr sz="2000" b="1"/>
+            </a:pPr>
+            <a:r>
+              <a:t>严重的幻觉现象</a:t>
+            </a:r>
+          </a:p>
+        </p:txBody>
+      </p:sp>
+      <p:sp>
+        <p:nvSpPr>
+          <p:cNvPr id="12" name="TextBox 11"/>
+          <p:cNvSpPr txBox="1"/>
+          <p:nvPr/>
+        </p:nvSpPr>
+        <p:spPr>
+          <a:xfrm>
+            <a:off x="1645920" y="3840480"/>
+            <a:ext cx="1097280" cy="274320"/>
+          </a:xfrm>
+          <a:prstGeom prst="rect">
+            <a:avLst/>
+          </a:prstGeom>
+          <a:noFill/>
+        </p:spPr>
+        <p:txBody>
+          <a:bodyPr wrap="none">
+            <a:spAutoFit/>
+          </a:bodyPr>
+          <a:lstStyle/>
+          <a:p>
+            <a:pPr>
+              <a:defRPr sz="1200"/>
+            </a:pPr>
+            <a:r>
+              <a:t>实际字段</a:t>
+            </a:r>
+          </a:p>
+        </p:txBody>
+      </p:sp>
+      <p:sp>
+        <p:nvSpPr>
+          <p:cNvPr id="13" name="TextBox 12"/>
+          <p:cNvSpPr txBox="1"/>
+          <p:nvPr/>
+        </p:nvSpPr>
+        <p:spPr>
+          <a:xfrm>
+            <a:off x="2743200" y="3840480"/>
+            <a:ext cx="1097280" cy="274320"/>
+          </a:xfrm>
+          <a:prstGeom prst="rect">
+            <a:avLst/>
+          </a:prstGeom>
+          <a:noFill/>
+        </p:spPr>
+        <p:txBody>
+          <a:bodyPr wrap="none">
+            <a:spAutoFit/>
+          </a:bodyPr>
+          <a:lstStyle/>
+          <a:p>
+            <a:pPr>
+              <a:defRPr sz="1200">
+                <a:solidFill>
+                  <a:srgbClr val="9E2A2B"/>
+                </a:solidFill>
+              </a:defRPr>
+            </a:pPr>
+            <a:r>
+              <a:t>虚构字段</a:t>
+            </a:r>
+          </a:p>
+        </p:txBody>
+      </p:sp>
+      <p:sp>
+        <p:nvSpPr>
+          <p:cNvPr id="14" name="Rectangle 13"/>
           <p:cNvSpPr/>
           <p:nvPr/>
         </p:nvSpPr>
         <p:spPr>
           <a:xfrm>
-            <a:off x="6949440" y="1554480"/>
+            <a:off x="1645920" y="4206240"/>
             <a:ext cx="1097280" cy="914400"/>
           </a:xfrm>
-          <a:prstGeom prst="triangle">
+          <a:prstGeom prst="rect">
             <a:avLst/>
           </a:prstGeom>
           <a:solidFill>
-            <a:srgbClr val="FFCDD2"/>
+            <a:srgbClr val="B0B0B0"/>
           </a:solidFill>
-          <a:ln w="38100">
-            <a:solidFill>
-              <a:srgbClr val="E53935"/>
-            </a:solidFill>
+          <a:ln>
+            <a:noFill/>
           </a:ln>
         </p:spPr>
         <p:style>
@@ -3878,194 +3567,23 @@
       </p:sp>
       <p:sp>
         <p:nvSpPr>
-          <p:cNvPr id="17" name="TextBox 16"/>
-          <p:cNvSpPr txBox="1"/>
+          <p:cNvPr id="15" name="Rectangle 14"/>
+          <p:cNvSpPr/>
           <p:nvPr/>
         </p:nvSpPr>
         <p:spPr>
           <a:xfrm>
-            <a:off x="6949440" y="1645920"/>
-            <a:ext cx="1097280" cy="731520"/>
+            <a:off x="2743200" y="4206240"/>
+            <a:ext cx="1828800" cy="914400"/>
           </a:xfrm>
           <a:prstGeom prst="rect">
             <a:avLst/>
           </a:prstGeom>
-          <a:noFill/>
-        </p:spPr>
-        <p:txBody>
-          <a:bodyPr wrap="none">
-            <a:spAutoFit/>
-          </a:bodyPr>
-          <a:lstStyle/>
-          <a:p>
-            <a:pPr algn="ctr">
-              <a:defRPr sz="4000" b="1">
-                <a:solidFill>
-                  <a:srgbClr val="E53935"/>
-                </a:solidFill>
-              </a:defRPr>
-            </a:pPr>
-            <a:r>
-              <a:t>!</a:t>
-            </a:r>
-          </a:p>
-        </p:txBody>
-      </p:sp>
-      <p:graphicFrame>
-        <p:nvGraphicFramePr>
-          <p:cNvPr id="18" name="Chart 17"/>
-          <p:cNvGraphicFramePr>
-            <a:graphicFrameLocks noGrp="1"/>
-          </p:cNvGraphicFramePr>
-          <p:nvPr/>
-        </p:nvGraphicFramePr>
-        <p:xfrm>
-          <a:off x="8961120" y="1371600"/>
-          <a:ext cx="1828800" cy="1371600"/>
-        </p:xfrm>
-        <a:graphic>
-          <a:graphicData uri="http://schemas.openxmlformats.org/drawingml/2006/chart">
-            <c:chart xmlns:c="http://schemas.openxmlformats.org/drawingml/2006/chart" r:id="rId2"/>
-          </a:graphicData>
-        </a:graphic>
-      </p:graphicFrame>
-      <p:sp>
-        <p:nvSpPr>
-          <p:cNvPr id="19" name="TextBox 18"/>
-          <p:cNvSpPr txBox="1"/>
-          <p:nvPr/>
-        </p:nvSpPr>
-        <p:spPr>
-          <a:xfrm>
-            <a:off x="9144000" y="1828800"/>
-            <a:ext cx="914400" cy="365760"/>
-          </a:xfrm>
-          <a:prstGeom prst="rect">
-            <a:avLst/>
-          </a:prstGeom>
-          <a:noFill/>
-        </p:spPr>
-        <p:txBody>
-          <a:bodyPr wrap="none">
-            <a:spAutoFit/>
-          </a:bodyPr>
-          <a:lstStyle/>
-          <a:p>
-            <a:pPr algn="ctr">
-              <a:defRPr sz="1000" b="1">
-                <a:solidFill>
-                  <a:srgbClr val="E53935"/>
-                </a:solidFill>
-              </a:defRPr>
-            </a:pPr>
-            <a:r>
-              <a:t>50%</a:t>
-            </a:r>
-          </a:p>
-          <a:p>
-            <a:r>
-              <a:t>虚构字段</a:t>
-            </a:r>
-          </a:p>
-        </p:txBody>
-      </p:sp>
-      <p:sp>
-        <p:nvSpPr>
-          <p:cNvPr id="20" name="TextBox 19"/>
-          <p:cNvSpPr txBox="1"/>
-          <p:nvPr/>
-        </p:nvSpPr>
-        <p:spPr>
-          <a:xfrm>
-            <a:off x="10058400" y="1828800"/>
-            <a:ext cx="914400" cy="365760"/>
-          </a:xfrm>
-          <a:prstGeom prst="rect">
-            <a:avLst/>
-          </a:prstGeom>
-          <a:noFill/>
-        </p:spPr>
-        <p:txBody>
-          <a:bodyPr wrap="none">
-            <a:spAutoFit/>
-          </a:bodyPr>
-          <a:lstStyle/>
-          <a:p>
-            <a:pPr algn="ctr">
-              <a:defRPr sz="1000">
-                <a:solidFill>
-                  <a:srgbClr val="555555"/>
-                </a:solidFill>
-              </a:defRPr>
-            </a:pPr>
-            <a:r>
-              <a:t>50%</a:t>
-            </a:r>
-          </a:p>
-          <a:p>
-            <a:r>
-              <a:t>真实字段</a:t>
-            </a:r>
-          </a:p>
-        </p:txBody>
-      </p:sp>
-      <p:sp>
-        <p:nvSpPr>
-          <p:cNvPr id="21" name="TextBox 20"/>
-          <p:cNvSpPr txBox="1"/>
-          <p:nvPr/>
-        </p:nvSpPr>
-        <p:spPr>
-          <a:xfrm>
-            <a:off x="6217920" y="2743200"/>
-            <a:ext cx="5486400" cy="365760"/>
-          </a:xfrm>
-          <a:prstGeom prst="rect">
-            <a:avLst/>
-          </a:prstGeom>
-          <a:noFill/>
-        </p:spPr>
-        <p:txBody>
-          <a:bodyPr wrap="none">
-            <a:spAutoFit/>
-          </a:bodyPr>
-          <a:lstStyle/>
-          <a:p>
-            <a:pPr algn="ctr">
-              <a:defRPr sz="1600" b="1">
-                <a:solidFill>
-                  <a:srgbClr val="E53935"/>
-                </a:solidFill>
-                <a:latin typeface="Microsoft YaHei"/>
-              </a:defRPr>
-            </a:pPr>
-            <a:r>
-              <a:t>警告：虚构字段占比过高，引发严重错误</a:t>
-            </a:r>
-          </a:p>
-        </p:txBody>
-      </p:sp>
-      <p:sp>
-        <p:nvSpPr>
-          <p:cNvPr id="22" name="Rounded Rectangle 21"/>
-          <p:cNvSpPr/>
-          <p:nvPr/>
-        </p:nvSpPr>
-        <p:spPr>
-          <a:xfrm>
-            <a:off x="6217920" y="3474720"/>
-            <a:ext cx="5486400" cy="3017520"/>
-          </a:xfrm>
-          <a:prstGeom prst="roundRect">
-            <a:avLst/>
-          </a:prstGeom>
           <a:solidFill>
-            <a:srgbClr val="FFFFFF"/>
+            <a:srgbClr val="9E2A2B"/>
           </a:solidFill>
-          <a:ln w="12700">
-            <a:solidFill>
-              <a:srgbClr val="E0E0E0"/>
-            </a:solidFill>
+          <a:ln>
+            <a:noFill/>
           </a:ln>
         </p:spPr>
         <p:style>
@@ -4086,20 +3604,105 @@
           <a:bodyPr rtlCol="0" anchor="ctr"/>
           <a:lstStyle/>
           <a:p>
-            <a:pPr algn="ctr"/>
-          </a:p>
-        </p:txBody>
-      </p:sp>
-      <p:sp>
-        <p:nvSpPr>
-          <p:cNvPr id="23" name="TextBox 22"/>
+            <a:pPr algn="ctr">
+              <a:defRPr sz="1400">
+                <a:solidFill>
+                  <a:srgbClr val="FFFFFF"/>
+                </a:solidFill>
+              </a:defRPr>
+            </a:pPr>
+            <a:r>
+              <a:t>9处关键字段</a:t>
+            </a:r>
+          </a:p>
+          <a:p>
+            <a:pPr algn="ctr">
+              <a:defRPr sz="1400">
+                <a:solidFill>
+                  <a:srgbClr val="FFFFFF"/>
+                </a:solidFill>
+              </a:defRPr>
+            </a:pPr>
+            <a:r>
+              <a:t>(占比 50%)</a:t>
+            </a:r>
+          </a:p>
+        </p:txBody>
+      </p:sp>
+      <p:sp>
+        <p:nvSpPr>
+          <p:cNvPr id="16" name="Right Arrow 15"/>
+          <p:cNvSpPr/>
+          <p:nvPr/>
+        </p:nvSpPr>
+        <p:spPr>
+          <a:xfrm>
+            <a:off x="4663440" y="4297680"/>
+            <a:ext cx="1097280" cy="731520"/>
+          </a:xfrm>
+          <a:prstGeom prst="rightArrow">
+            <a:avLst/>
+          </a:prstGeom>
+          <a:solidFill>
+            <a:srgbClr val="C13C3D"/>
+          </a:solidFill>
+          <a:ln>
+            <a:noFill/>
+          </a:ln>
+        </p:spPr>
+        <p:style>
+          <a:lnRef idx="1">
+            <a:schemeClr val="accent1"/>
+          </a:lnRef>
+          <a:fillRef idx="3">
+            <a:schemeClr val="accent1"/>
+          </a:fillRef>
+          <a:effectRef idx="2">
+            <a:schemeClr val="accent1"/>
+          </a:effectRef>
+          <a:fontRef idx="minor">
+            <a:schemeClr val="lt1"/>
+          </a:fontRef>
+        </p:style>
+        <p:txBody>
+          <a:bodyPr rtlCol="0" anchor="ctr"/>
+          <a:lstStyle/>
+          <a:p>
+            <a:pPr algn="ctr">
+              <a:defRPr sz="1100">
+                <a:solidFill>
+                  <a:srgbClr val="FFFFFF"/>
+                </a:solidFill>
+              </a:defRPr>
+            </a:pPr>
+            <a:r>
+              <a:t>连锁关键字段</a:t>
+            </a:r>
+          </a:p>
+          <a:p>
+            <a:pPr algn="ctr">
+              <a:defRPr sz="1100">
+                <a:solidFill>
+                  <a:srgbClr val="FFFFFF"/>
+                </a:solidFill>
+              </a:defRPr>
+            </a:pPr>
+            <a:r>
+              <a:t>(21个)</a:t>
+            </a:r>
+          </a:p>
+        </p:txBody>
+      </p:sp>
+      <p:sp>
+        <p:nvSpPr>
+          <p:cNvPr id="17" name="TextBox 16"/>
           <p:cNvSpPr txBox="1"/>
           <p:nvPr/>
         </p:nvSpPr>
         <p:spPr>
           <a:xfrm>
-            <a:off x="6217920" y="3520440"/>
-            <a:ext cx="2743200" cy="365760"/>
+            <a:off x="731520" y="5303520"/>
+            <a:ext cx="731520" cy="731520"/>
           </a:xfrm>
           <a:prstGeom prst="rect">
             <a:avLst/>
@@ -4112,39 +3715,527 @@
           </a:bodyPr>
           <a:lstStyle/>
           <a:p>
-            <a:pPr algn="ctr">
-              <a:defRPr sz="1000" b="1"/>
+            <a:pPr>
+              <a:defRPr sz="3200"/>
             </a:pPr>
-            <a:r>
-              <a:t>AI生成过程</a:t>
-            </a:r>
-          </a:p>
-          <a:p>
-            <a:r>
-              <a:t>(Claude Code)</a:t>
-            </a:r>
-          </a:p>
-        </p:txBody>
-      </p:sp>
-      <p:sp>
-        <p:nvSpPr>
-          <p:cNvPr id="24" name="Trapezoid 23"/>
+          </a:p>
+        </p:txBody>
+      </p:sp>
+      <p:sp>
+        <p:nvSpPr>
+          <p:cNvPr id="18" name="TextBox 17"/>
+          <p:cNvSpPr txBox="1"/>
+          <p:nvPr/>
+        </p:nvSpPr>
+        <p:spPr>
+          <a:xfrm>
+            <a:off x="1645920" y="5212080"/>
+            <a:ext cx="3657600" cy="365760"/>
+          </a:xfrm>
+          <a:prstGeom prst="rect">
+            <a:avLst/>
+          </a:prstGeom>
+          <a:noFill/>
+        </p:spPr>
+        <p:txBody>
+          <a:bodyPr wrap="none">
+            <a:spAutoFit/>
+          </a:bodyPr>
+          <a:lstStyle/>
+          <a:p>
+            <a:pPr>
+              <a:defRPr sz="2000" b="1"/>
+            </a:pPr>
+            <a:r>
+              <a:t>接口规范缺失</a:t>
+            </a:r>
+          </a:p>
+        </p:txBody>
+      </p:sp>
+      <p:sp>
+        <p:nvSpPr>
+          <p:cNvPr id="19" name="TextBox 18"/>
+          <p:cNvSpPr txBox="1"/>
+          <p:nvPr/>
+        </p:nvSpPr>
+        <p:spPr>
+          <a:xfrm>
+            <a:off x="1645920" y="5577840"/>
+            <a:ext cx="4114800" cy="914400"/>
+          </a:xfrm>
+          <a:prstGeom prst="rect">
+            <a:avLst/>
+          </a:prstGeom>
+          <a:noFill/>
+        </p:spPr>
+        <p:txBody>
+          <a:bodyPr wrap="square">
+            <a:spAutoFit/>
+          </a:bodyPr>
+          <a:lstStyle/>
+          <a:p>
+            <a:pPr>
+              <a:defRPr sz="1400"/>
+            </a:pPr>
+            <a:r>
+              <a:t>• AI 无法识别 SAP 函数模块 (FM) 仅接受 DDIC 类型的硬性规则。</a:t>
+            </a:r>
+          </a:p>
+          <a:p>
+            <a:pPr>
+              <a:defRPr sz="1400"/>
+            </a:pPr>
+            <a:r>
+              <a:t> 数据类型不匹配导致接口调用必然失败。</a:t>
+            </a:r>
+          </a:p>
+        </p:txBody>
+      </p:sp>
+      <p:sp>
+        <p:nvSpPr>
+          <p:cNvPr id="20" name="TextBox 19"/>
+          <p:cNvSpPr txBox="1"/>
+          <p:nvPr/>
+        </p:nvSpPr>
+        <p:spPr>
+          <a:xfrm>
+            <a:off x="5669280" y="5303520"/>
+            <a:ext cx="731520" cy="731520"/>
+          </a:xfrm>
+          <a:prstGeom prst="rect">
+            <a:avLst/>
+          </a:prstGeom>
+          <a:noFill/>
+        </p:spPr>
+        <p:txBody>
+          <a:bodyPr wrap="none">
+            <a:spAutoFit/>
+          </a:bodyPr>
+          <a:lstStyle/>
+          <a:p>
+            <a:pPr>
+              <a:defRPr sz="3200"/>
+            </a:pPr>
+          </a:p>
+        </p:txBody>
+      </p:sp>
+      <p:sp>
+        <p:nvSpPr>
+          <p:cNvPr id="21" name="TextBox 20"/>
+          <p:cNvSpPr txBox="1"/>
+          <p:nvPr/>
+        </p:nvSpPr>
+        <p:spPr>
+          <a:xfrm>
+            <a:off x="6583680" y="5212080"/>
+            <a:ext cx="3657600" cy="365760"/>
+          </a:xfrm>
+          <a:prstGeom prst="rect">
+            <a:avLst/>
+          </a:prstGeom>
+          <a:noFill/>
+        </p:spPr>
+        <p:txBody>
+          <a:bodyPr wrap="none">
+            <a:spAutoFit/>
+          </a:bodyPr>
+          <a:lstStyle/>
+          <a:p>
+            <a:pPr>
+              <a:defRPr sz="2000" b="1"/>
+            </a:pPr>
+            <a:r>
+              <a:t>开发成本倒挂</a:t>
+            </a:r>
+          </a:p>
+        </p:txBody>
+      </p:sp>
+      <p:sp>
+        <p:nvSpPr>
+          <p:cNvPr id="22" name="TextBox 21"/>
+          <p:cNvSpPr txBox="1"/>
+          <p:nvPr/>
+        </p:nvSpPr>
+        <p:spPr>
+          <a:xfrm>
+            <a:off x="6583680" y="5577840"/>
+            <a:ext cx="4572000" cy="914400"/>
+          </a:xfrm>
+          <a:prstGeom prst="rect">
+            <a:avLst/>
+          </a:prstGeom>
+          <a:noFill/>
+        </p:spPr>
+        <p:txBody>
+          <a:bodyPr wrap="square">
+            <a:spAutoFit/>
+          </a:bodyPr>
+          <a:lstStyle/>
+          <a:p>
+            <a:pPr>
+              <a:defRPr sz="1400"/>
+            </a:pPr>
+            <a:r>
+              <a:t>• 修复 AI 错误的代码成本已超过直接重写。</a:t>
+            </a:r>
+          </a:p>
+          <a:p>
+            <a:pPr>
+              <a:defRPr sz="1400"/>
+            </a:pPr>
+            <a:r>
+              <a:t> AI 辅助在该场景下失去价值，带来负面效率。</a:t>
+            </a:r>
+          </a:p>
+        </p:txBody>
+      </p:sp>
+      <p:sp>
+        <p:nvSpPr>
+          <p:cNvPr id="23" name="Rounded Rectangle 22"/>
           <p:cNvSpPr/>
           <p:nvPr/>
         </p:nvSpPr>
         <p:spPr>
-          <a:xfrm rot="10800000">
-            <a:off x="6675120" y="3931920"/>
-            <a:ext cx="1828800" cy="320040"/>
-          </a:xfrm>
-          <a:prstGeom prst="trapezoid">
+          <a:xfrm>
+            <a:off x="5852160" y="2011680"/>
+            <a:ext cx="5760720" cy="3017520"/>
+          </a:xfrm>
+          <a:prstGeom prst="roundRect">
             <a:avLst/>
           </a:prstGeom>
           <a:solidFill>
-            <a:srgbClr val="285296"/>
+            <a:srgbClr val="F9F9F9"/>
           </a:solidFill>
           <a:ln>
-            <a:noFill/>
+            <a:solidFill>
+              <a:srgbClr val="CCCCCC"/>
+            </a:solidFill>
+          </a:ln>
+        </p:spPr>
+        <p:style>
+          <a:lnRef idx="1">
+            <a:schemeClr val="accent1"/>
+          </a:lnRef>
+          <a:fillRef idx="3">
+            <a:schemeClr val="accent1"/>
+          </a:fillRef>
+          <a:effectRef idx="2">
+            <a:schemeClr val="accent1"/>
+          </a:effectRef>
+          <a:fontRef idx="minor">
+            <a:schemeClr val="lt1"/>
+          </a:fontRef>
+        </p:style>
+        <p:txBody>
+          <a:bodyPr rtlCol="0" anchor="ctr"/>
+          <a:lstStyle/>
+          <a:p>
+            <a:pPr algn="ctr"/>
+          </a:p>
+        </p:txBody>
+      </p:sp>
+      <p:sp>
+        <p:nvSpPr>
+          <p:cNvPr id="24" name="TextBox 23"/>
+          <p:cNvSpPr txBox="1"/>
+          <p:nvPr/>
+        </p:nvSpPr>
+        <p:spPr>
+          <a:xfrm>
+            <a:off x="5943600" y="2103120"/>
+            <a:ext cx="1188720" cy="274320"/>
+          </a:xfrm>
+          <a:prstGeom prst="rect">
+            <a:avLst/>
+          </a:prstGeom>
+          <a:noFill/>
+        </p:spPr>
+        <p:txBody>
+          <a:bodyPr wrap="none">
+            <a:spAutoFit/>
+          </a:bodyPr>
+          <a:lstStyle/>
+          <a:p>
+            <a:pPr algn="ctr">
+              <a:defRPr sz="1200"/>
+            </a:pPr>
+            <a:r>
+              <a:t>实际字段</a:t>
+            </a:r>
+          </a:p>
+        </p:txBody>
+      </p:sp>
+      <p:sp>
+        <p:nvSpPr>
+          <p:cNvPr id="25" name="TextBox 24"/>
+          <p:cNvSpPr txBox="1"/>
+          <p:nvPr/>
+        </p:nvSpPr>
+        <p:spPr>
+          <a:xfrm>
+            <a:off x="7178040" y="2103120"/>
+            <a:ext cx="1645920" cy="274320"/>
+          </a:xfrm>
+          <a:prstGeom prst="rect">
+            <a:avLst/>
+          </a:prstGeom>
+          <a:noFill/>
+        </p:spPr>
+        <p:txBody>
+          <a:bodyPr wrap="none">
+            <a:spAutoFit/>
+          </a:bodyPr>
+          <a:lstStyle/>
+          <a:p>
+            <a:pPr algn="ctr">
+              <a:defRPr sz="1200">
+                <a:solidFill>
+                  <a:srgbClr val="9E2A2B"/>
+                </a:solidFill>
+              </a:defRPr>
+            </a:pPr>
+            <a:r>
+              <a:t>虚构字段</a:t>
+            </a:r>
+          </a:p>
+        </p:txBody>
+      </p:sp>
+      <p:sp>
+        <p:nvSpPr>
+          <p:cNvPr id="26" name="TextBox 25"/>
+          <p:cNvSpPr txBox="1"/>
+          <p:nvPr/>
+        </p:nvSpPr>
+        <p:spPr>
+          <a:xfrm>
+            <a:off x="9144000" y="2103120"/>
+            <a:ext cx="2286000" cy="274320"/>
+          </a:xfrm>
+          <a:prstGeom prst="rect">
+            <a:avLst/>
+          </a:prstGeom>
+          <a:noFill/>
+        </p:spPr>
+        <p:txBody>
+          <a:bodyPr wrap="none">
+            <a:spAutoFit/>
+          </a:bodyPr>
+          <a:lstStyle/>
+          <a:p>
+            <a:pPr algn="ctr">
+              <a:defRPr sz="1200">
+                <a:solidFill>
+                  <a:srgbClr val="9E2A2B"/>
+                </a:solidFill>
+              </a:defRPr>
+            </a:pPr>
+            <a:r>
+              <a:t>连锁语法错误</a:t>
+            </a:r>
+          </a:p>
+        </p:txBody>
+      </p:sp>
+      <p:sp>
+        <p:nvSpPr>
+          <p:cNvPr id="27" name="Rectangle 26"/>
+          <p:cNvSpPr/>
+          <p:nvPr/>
+        </p:nvSpPr>
+        <p:spPr>
+          <a:xfrm>
+            <a:off x="5943600" y="2468880"/>
+            <a:ext cx="1188720" cy="457200"/>
+          </a:xfrm>
+          <a:prstGeom prst="rect">
+            <a:avLst/>
+          </a:prstGeom>
+          <a:solidFill>
+            <a:srgbClr val="B0B0B0"/>
+          </a:solidFill>
+          <a:ln w="12700">
+            <a:solidFill>
+              <a:srgbClr val="FFFFFF"/>
+            </a:solidFill>
+          </a:ln>
+        </p:spPr>
+        <p:style>
+          <a:lnRef idx="1">
+            <a:schemeClr val="accent1"/>
+          </a:lnRef>
+          <a:fillRef idx="3">
+            <a:schemeClr val="accent1"/>
+          </a:fillRef>
+          <a:effectRef idx="2">
+            <a:schemeClr val="accent1"/>
+          </a:effectRef>
+          <a:fontRef idx="minor">
+            <a:schemeClr val="lt1"/>
+          </a:fontRef>
+        </p:style>
+        <p:txBody>
+          <a:bodyPr rtlCol="0" anchor="ctr"/>
+          <a:lstStyle/>
+          <a:p>
+            <a:pPr algn="ctr"/>
+          </a:p>
+        </p:txBody>
+      </p:sp>
+      <p:sp>
+        <p:nvSpPr>
+          <p:cNvPr id="28" name="Rectangle 27"/>
+          <p:cNvSpPr/>
+          <p:nvPr/>
+        </p:nvSpPr>
+        <p:spPr>
+          <a:xfrm>
+            <a:off x="5943600" y="2971800"/>
+            <a:ext cx="1188720" cy="457200"/>
+          </a:xfrm>
+          <a:prstGeom prst="rect">
+            <a:avLst/>
+          </a:prstGeom>
+          <a:solidFill>
+            <a:srgbClr val="B0B0B0"/>
+          </a:solidFill>
+          <a:ln w="12700">
+            <a:solidFill>
+              <a:srgbClr val="FFFFFF"/>
+            </a:solidFill>
+          </a:ln>
+        </p:spPr>
+        <p:style>
+          <a:lnRef idx="1">
+            <a:schemeClr val="accent1"/>
+          </a:lnRef>
+          <a:fillRef idx="3">
+            <a:schemeClr val="accent1"/>
+          </a:fillRef>
+          <a:effectRef idx="2">
+            <a:schemeClr val="accent1"/>
+          </a:effectRef>
+          <a:fontRef idx="minor">
+            <a:schemeClr val="lt1"/>
+          </a:fontRef>
+        </p:style>
+        <p:txBody>
+          <a:bodyPr rtlCol="0" anchor="ctr"/>
+          <a:lstStyle/>
+          <a:p>
+            <a:pPr algn="ctr"/>
+          </a:p>
+        </p:txBody>
+      </p:sp>
+      <p:sp>
+        <p:nvSpPr>
+          <p:cNvPr id="29" name="Rectangle 28"/>
+          <p:cNvSpPr/>
+          <p:nvPr/>
+        </p:nvSpPr>
+        <p:spPr>
+          <a:xfrm>
+            <a:off x="5943600" y="3474720"/>
+            <a:ext cx="1188720" cy="457200"/>
+          </a:xfrm>
+          <a:prstGeom prst="rect">
+            <a:avLst/>
+          </a:prstGeom>
+          <a:solidFill>
+            <a:srgbClr val="B0B0B0"/>
+          </a:solidFill>
+          <a:ln w="12700">
+            <a:solidFill>
+              <a:srgbClr val="FFFFFF"/>
+            </a:solidFill>
+          </a:ln>
+        </p:spPr>
+        <p:style>
+          <a:lnRef idx="1">
+            <a:schemeClr val="accent1"/>
+          </a:lnRef>
+          <a:fillRef idx="3">
+            <a:schemeClr val="accent1"/>
+          </a:fillRef>
+          <a:effectRef idx="2">
+            <a:schemeClr val="accent1"/>
+          </a:effectRef>
+          <a:fontRef idx="minor">
+            <a:schemeClr val="lt1"/>
+          </a:fontRef>
+        </p:style>
+        <p:txBody>
+          <a:bodyPr rtlCol="0" anchor="ctr"/>
+          <a:lstStyle/>
+          <a:p>
+            <a:pPr algn="ctr"/>
+          </a:p>
+        </p:txBody>
+      </p:sp>
+      <p:sp>
+        <p:nvSpPr>
+          <p:cNvPr id="30" name="Rectangle 29"/>
+          <p:cNvSpPr/>
+          <p:nvPr/>
+        </p:nvSpPr>
+        <p:spPr>
+          <a:xfrm>
+            <a:off x="5943600" y="3977640"/>
+            <a:ext cx="1188720" cy="457200"/>
+          </a:xfrm>
+          <a:prstGeom prst="rect">
+            <a:avLst/>
+          </a:prstGeom>
+          <a:solidFill>
+            <a:srgbClr val="B0B0B0"/>
+          </a:solidFill>
+          <a:ln w="12700">
+            <a:solidFill>
+              <a:srgbClr val="FFFFFF"/>
+            </a:solidFill>
+          </a:ln>
+        </p:spPr>
+        <p:style>
+          <a:lnRef idx="1">
+            <a:schemeClr val="accent1"/>
+          </a:lnRef>
+          <a:fillRef idx="3">
+            <a:schemeClr val="accent1"/>
+          </a:fillRef>
+          <a:effectRef idx="2">
+            <a:schemeClr val="accent1"/>
+          </a:effectRef>
+          <a:fontRef idx="minor">
+            <a:schemeClr val="lt1"/>
+          </a:fontRef>
+        </p:style>
+        <p:txBody>
+          <a:bodyPr rtlCol="0" anchor="ctr"/>
+          <a:lstStyle/>
+          <a:p>
+            <a:pPr algn="ctr"/>
+          </a:p>
+        </p:txBody>
+      </p:sp>
+      <p:sp>
+        <p:nvSpPr>
+          <p:cNvPr id="31" name="Rectangle 30"/>
+          <p:cNvSpPr/>
+          <p:nvPr/>
+        </p:nvSpPr>
+        <p:spPr>
+          <a:xfrm>
+            <a:off x="7178040" y="2468880"/>
+            <a:ext cx="1645920" cy="621792"/>
+          </a:xfrm>
+          <a:prstGeom prst="rect">
+            <a:avLst/>
+          </a:prstGeom>
+          <a:solidFill>
+            <a:srgbClr val="9E2A2B"/>
+          </a:solidFill>
+          <a:ln w="12700">
+            <a:solidFill>
+              <a:srgbClr val="FFFFFF"/>
+            </a:solidFill>
           </a:ln>
         </p:spPr>
         <p:style>
@@ -4173,30 +4264,32 @@
               </a:defRPr>
             </a:pPr>
             <a:r>
-              <a:t>需求输入</a:t>
-            </a:r>
-          </a:p>
-        </p:txBody>
-      </p:sp>
-      <p:sp>
-        <p:nvSpPr>
-          <p:cNvPr id="25" name="Trapezoid 24"/>
+              <a:t>虚构: QUOTA_MATNR</a:t>
+            </a:r>
+          </a:p>
+        </p:txBody>
+      </p:sp>
+      <p:sp>
+        <p:nvSpPr>
+          <p:cNvPr id="32" name="Rectangle 31"/>
           <p:cNvSpPr/>
           <p:nvPr/>
         </p:nvSpPr>
         <p:spPr>
-          <a:xfrm rot="10800000">
-            <a:off x="6903720" y="4297680"/>
-            <a:ext cx="1371600" cy="320040"/>
-          </a:xfrm>
-          <a:prstGeom prst="trapezoid">
+          <a:xfrm>
+            <a:off x="7178040" y="3139135"/>
+            <a:ext cx="1645920" cy="621792"/>
+          </a:xfrm>
+          <a:prstGeom prst="rect">
             <a:avLst/>
           </a:prstGeom>
           <a:solidFill>
-            <a:srgbClr val="5B9BD5"/>
+            <a:srgbClr val="9E2A2B"/>
           </a:solidFill>
-          <a:ln>
-            <a:noFill/>
+          <a:ln w="12700">
+            <a:solidFill>
+              <a:srgbClr val="FFFFFF"/>
+            </a:solidFill>
           </a:ln>
         </p:spPr>
         <p:style>
@@ -4225,547 +4318,32 @@
               </a:defRPr>
             </a:pPr>
             <a:r>
-              <a:t>代码生成</a:t>
-            </a:r>
-          </a:p>
-        </p:txBody>
-      </p:sp>
-      <p:sp>
-        <p:nvSpPr>
-          <p:cNvPr id="26" name="Trapezoid 25"/>
+              <a:t>虚构: SOURCE_VENDOR</a:t>
+            </a:r>
+          </a:p>
+        </p:txBody>
+      </p:sp>
+      <p:sp>
+        <p:nvSpPr>
+          <p:cNvPr id="33" name="Rectangle 32"/>
           <p:cNvSpPr/>
           <p:nvPr/>
         </p:nvSpPr>
         <p:spPr>
-          <a:xfrm rot="10800000">
-            <a:off x="7132320" y="4663440"/>
-            <a:ext cx="914400" cy="320040"/>
-          </a:xfrm>
-          <a:prstGeom prst="trapezoid">
+          <a:xfrm>
+            <a:off x="7178040" y="3809390"/>
+            <a:ext cx="1645920" cy="621792"/>
+          </a:xfrm>
+          <a:prstGeom prst="rect">
             <a:avLst/>
           </a:prstGeom>
           <a:solidFill>
-            <a:srgbClr val="9DC3E6"/>
+            <a:srgbClr val="9E2A2B"/>
           </a:solidFill>
-          <a:ln>
-            <a:noFill/>
-          </a:ln>
-        </p:spPr>
-        <p:style>
-          <a:lnRef idx="1">
-            <a:schemeClr val="accent1"/>
-          </a:lnRef>
-          <a:fillRef idx="3">
-            <a:schemeClr val="accent1"/>
-          </a:fillRef>
-          <a:effectRef idx="2">
-            <a:schemeClr val="accent1"/>
-          </a:effectRef>
-          <a:fontRef idx="minor">
-            <a:schemeClr val="lt1"/>
-          </a:fontRef>
-        </p:style>
-        <p:txBody>
-          <a:bodyPr rtlCol="0" anchor="ctr"/>
-          <a:lstStyle/>
-          <a:p>
-            <a:pPr algn="ctr">
-              <a:defRPr sz="1000">
-                <a:solidFill>
-                  <a:srgbClr val="333333"/>
-                </a:solidFill>
-              </a:defRPr>
-            </a:pPr>
-            <a:r>
-              <a:t>可用代码</a:t>
-            </a:r>
-          </a:p>
-        </p:txBody>
-      </p:sp>
-      <p:sp>
-        <p:nvSpPr>
-          <p:cNvPr id="27" name="Down Arrow 26"/>
-          <p:cNvSpPr/>
-          <p:nvPr/>
-        </p:nvSpPr>
-        <p:spPr>
-          <a:xfrm>
-            <a:off x="6309360" y="3931920"/>
-            <a:ext cx="137160" cy="1097280"/>
-          </a:xfrm>
-          <a:prstGeom prst="downArrow">
-            <a:avLst/>
-          </a:prstGeom>
-          <a:solidFill>
-            <a:srgbClr val="E53935"/>
-          </a:solidFill>
-          <a:ln>
-            <a:noFill/>
-          </a:ln>
-        </p:spPr>
-        <p:style>
-          <a:lnRef idx="1">
-            <a:schemeClr val="accent1"/>
-          </a:lnRef>
-          <a:fillRef idx="3">
-            <a:schemeClr val="accent1"/>
-          </a:fillRef>
-          <a:effectRef idx="2">
-            <a:schemeClr val="accent1"/>
-          </a:effectRef>
-          <a:fontRef idx="minor">
-            <a:schemeClr val="lt1"/>
-          </a:fontRef>
-        </p:style>
-        <p:txBody>
-          <a:bodyPr rtlCol="0" anchor="ctr"/>
-          <a:lstStyle/>
-          <a:p>
-            <a:pPr algn="ctr"/>
-          </a:p>
-        </p:txBody>
-      </p:sp>
-      <p:sp>
-        <p:nvSpPr>
-          <p:cNvPr id="28" name="Oval 27"/>
-          <p:cNvSpPr/>
-          <p:nvPr/>
-        </p:nvSpPr>
-        <p:spPr>
-          <a:xfrm>
-            <a:off x="6240780" y="5074920"/>
-            <a:ext cx="274320" cy="274320"/>
-          </a:xfrm>
-          <a:prstGeom prst="ellipse">
-            <a:avLst/>
-          </a:prstGeom>
-          <a:solidFill>
-            <a:srgbClr val="E53935"/>
-          </a:solidFill>
-          <a:ln>
-            <a:noFill/>
-          </a:ln>
-        </p:spPr>
-        <p:style>
-          <a:lnRef idx="1">
-            <a:schemeClr val="accent1"/>
-          </a:lnRef>
-          <a:fillRef idx="3">
-            <a:schemeClr val="accent1"/>
-          </a:fillRef>
-          <a:effectRef idx="2">
-            <a:schemeClr val="accent1"/>
-          </a:effectRef>
-          <a:fontRef idx="minor">
-            <a:schemeClr val="lt1"/>
-          </a:fontRef>
-        </p:style>
-        <p:txBody>
-          <a:bodyPr rtlCol="0" anchor="ctr"/>
-          <a:lstStyle/>
-          <a:p>
-            <a:pPr algn="ctr"/>
-          </a:p>
-        </p:txBody>
-      </p:sp>
-      <p:sp>
-        <p:nvSpPr>
-          <p:cNvPr id="29" name="TextBox 28"/>
-          <p:cNvSpPr txBox="1"/>
-          <p:nvPr/>
-        </p:nvSpPr>
-        <p:spPr>
-          <a:xfrm>
-            <a:off x="6240780" y="5029200"/>
-            <a:ext cx="274320" cy="274320"/>
-          </a:xfrm>
-          <a:prstGeom prst="rect">
-            <a:avLst/>
-          </a:prstGeom>
-          <a:noFill/>
-        </p:spPr>
-        <p:txBody>
-          <a:bodyPr wrap="none">
-            <a:spAutoFit/>
-          </a:bodyPr>
-          <a:lstStyle/>
-          <a:p>
-            <a:pPr algn="ctr">
-              <a:defRPr b="1">
-                <a:solidFill>
-                  <a:srgbClr val="FFFFFF"/>
-                </a:solidFill>
-              </a:defRPr>
-            </a:pPr>
-            <a:r>
-              <a:t>X</a:t>
-            </a:r>
-          </a:p>
-        </p:txBody>
-      </p:sp>
-      <p:sp>
-        <p:nvSpPr>
-          <p:cNvPr id="30" name="Right Arrow 29"/>
-          <p:cNvSpPr/>
-          <p:nvPr/>
-        </p:nvSpPr>
-        <p:spPr>
-          <a:xfrm>
-            <a:off x="8321040" y="4389120"/>
-            <a:ext cx="274320" cy="91440"/>
-          </a:xfrm>
-          <a:prstGeom prst="rightArrow">
-            <a:avLst/>
-          </a:prstGeom>
-          <a:solidFill>
-            <a:srgbClr val="E53935"/>
-          </a:solidFill>
-          <a:ln>
-            <a:noFill/>
-          </a:ln>
-        </p:spPr>
-        <p:style>
-          <a:lnRef idx="1">
-            <a:schemeClr val="accent1"/>
-          </a:lnRef>
-          <a:fillRef idx="3">
-            <a:schemeClr val="accent1"/>
-          </a:fillRef>
-          <a:effectRef idx="2">
-            <a:schemeClr val="accent1"/>
-          </a:effectRef>
-          <a:fontRef idx="minor">
-            <a:schemeClr val="lt1"/>
-          </a:fontRef>
-        </p:style>
-        <p:txBody>
-          <a:bodyPr rtlCol="0" anchor="ctr"/>
-          <a:lstStyle/>
-          <a:p>
-            <a:pPr algn="ctr"/>
-          </a:p>
-        </p:txBody>
-      </p:sp>
-      <p:sp>
-        <p:nvSpPr>
-          <p:cNvPr id="31" name="TextBox 30"/>
-          <p:cNvSpPr txBox="1"/>
-          <p:nvPr/>
-        </p:nvSpPr>
-        <p:spPr>
-          <a:xfrm>
-            <a:off x="8595360" y="4251960"/>
-            <a:ext cx="1371600" cy="365760"/>
-          </a:xfrm>
-          <a:prstGeom prst="rect">
-            <a:avLst/>
-          </a:prstGeom>
-          <a:noFill/>
-        </p:spPr>
-        <p:txBody>
-          <a:bodyPr wrap="none">
-            <a:spAutoFit/>
-          </a:bodyPr>
-          <a:lstStyle/>
-          <a:p>
-            <a:pPr algn="ctr">
-              <a:defRPr sz="800" b="1"/>
-            </a:pPr>
-            <a:r>
-              <a:t>数据字典“幻觉”</a:t>
-            </a:r>
-          </a:p>
-          <a:p>
-            <a:r>
-              <a:t>虚构字段</a:t>
-            </a:r>
-          </a:p>
-        </p:txBody>
-      </p:sp>
-      <p:sp>
-        <p:nvSpPr>
-          <p:cNvPr id="32" name="Right Arrow 31"/>
-          <p:cNvSpPr/>
-          <p:nvPr/>
-        </p:nvSpPr>
-        <p:spPr>
-          <a:xfrm>
-            <a:off x="8138160" y="4754880"/>
-            <a:ext cx="274320" cy="91440"/>
-          </a:xfrm>
-          <a:prstGeom prst="rightArrow">
-            <a:avLst/>
-          </a:prstGeom>
-          <a:solidFill>
-            <a:srgbClr val="E53935"/>
-          </a:solidFill>
-          <a:ln>
-            <a:noFill/>
-          </a:ln>
-        </p:spPr>
-        <p:style>
-          <a:lnRef idx="1">
-            <a:schemeClr val="accent1"/>
-          </a:lnRef>
-          <a:fillRef idx="3">
-            <a:schemeClr val="accent1"/>
-          </a:fillRef>
-          <a:effectRef idx="2">
-            <a:schemeClr val="accent1"/>
-          </a:effectRef>
-          <a:fontRef idx="minor">
-            <a:schemeClr val="lt1"/>
-          </a:fontRef>
-        </p:style>
-        <p:txBody>
-          <a:bodyPr rtlCol="0" anchor="ctr"/>
-          <a:lstStyle/>
-          <a:p>
-            <a:pPr algn="ctr"/>
-          </a:p>
-        </p:txBody>
-      </p:sp>
-      <p:sp>
-        <p:nvSpPr>
-          <p:cNvPr id="33" name="TextBox 32"/>
-          <p:cNvSpPr txBox="1"/>
-          <p:nvPr/>
-        </p:nvSpPr>
-        <p:spPr>
-          <a:xfrm>
-            <a:off x="8412480" y="4663440"/>
-            <a:ext cx="1371600" cy="365760"/>
-          </a:xfrm>
-          <a:prstGeom prst="rect">
-            <a:avLst/>
-          </a:prstGeom>
-          <a:noFill/>
-        </p:spPr>
-        <p:txBody>
-          <a:bodyPr wrap="none">
-            <a:spAutoFit/>
-          </a:bodyPr>
-          <a:lstStyle/>
-          <a:p>
-            <a:pPr algn="ctr">
-              <a:defRPr sz="800" b="1"/>
-            </a:pPr>
-            <a:r>
-              <a:t>21+ 语法错误</a:t>
-            </a:r>
-          </a:p>
-          <a:p>
-            <a:r>
-              <a:t>修复成本高</a:t>
-            </a:r>
-          </a:p>
-        </p:txBody>
-      </p:sp>
-      <p:sp>
-        <p:nvSpPr>
-          <p:cNvPr id="34" name="&quot;No&quot; Symbol 33"/>
-          <p:cNvSpPr/>
-          <p:nvPr/>
-        </p:nvSpPr>
-        <p:spPr>
-          <a:xfrm>
-            <a:off x="8961120" y="4572000"/>
-            <a:ext cx="274320" cy="274320"/>
-          </a:xfrm>
-          <a:prstGeom prst="noSmoking">
-            <a:avLst/>
-          </a:prstGeom>
-          <a:solidFill>
-            <a:srgbClr val="1D3B6C"/>
-          </a:solidFill>
-          <a:ln>
-            <a:noFill/>
-          </a:ln>
-        </p:spPr>
-        <p:style>
-          <a:lnRef idx="1">
-            <a:schemeClr val="accent1"/>
-          </a:lnRef>
-          <a:fillRef idx="3">
-            <a:schemeClr val="accent1"/>
-          </a:fillRef>
-          <a:effectRef idx="2">
-            <a:schemeClr val="accent1"/>
-          </a:effectRef>
-          <a:fontRef idx="minor">
-            <a:schemeClr val="lt1"/>
-          </a:fontRef>
-        </p:style>
-        <p:txBody>
-          <a:bodyPr rtlCol="0" anchor="ctr"/>
-          <a:lstStyle/>
-          <a:p>
-            <a:pPr algn="ctr"/>
-          </a:p>
-        </p:txBody>
-      </p:sp>
-      <p:sp>
-        <p:nvSpPr>
-          <p:cNvPr id="35" name="TextBox 34"/>
-          <p:cNvSpPr txBox="1"/>
-          <p:nvPr/>
-        </p:nvSpPr>
-        <p:spPr>
-          <a:xfrm>
-            <a:off x="8686800" y="4846320"/>
-            <a:ext cx="822960" cy="365760"/>
-          </a:xfrm>
-          <a:prstGeom prst="rect">
-            <a:avLst/>
-          </a:prstGeom>
-          <a:noFill/>
-        </p:spPr>
-        <p:txBody>
-          <a:bodyPr wrap="none">
-            <a:spAutoFit/>
-          </a:bodyPr>
-          <a:lstStyle/>
-          <a:p>
-            <a:pPr algn="ctr">
-              <a:defRPr sz="800" b="1"/>
-            </a:pPr>
-            <a:r>
-              <a:t>高遗失,</a:t>
-            </a:r>
-          </a:p>
-          <a:p>
-            <a:r>
-              <a:t>不可用</a:t>
-            </a:r>
-          </a:p>
-        </p:txBody>
-      </p:sp>
-      <p:sp>
-        <p:nvSpPr>
-          <p:cNvPr id="36" name="TextBox 35"/>
-          <p:cNvSpPr txBox="1"/>
-          <p:nvPr/>
-        </p:nvSpPr>
-        <p:spPr>
-          <a:xfrm>
-            <a:off x="6675120" y="5074920"/>
-            <a:ext cx="1828800" cy="274320"/>
-          </a:xfrm>
-          <a:prstGeom prst="rect">
-            <a:avLst/>
-          </a:prstGeom>
-          <a:noFill/>
-        </p:spPr>
-        <p:txBody>
-          <a:bodyPr wrap="none">
-            <a:spAutoFit/>
-          </a:bodyPr>
-          <a:lstStyle/>
-          <a:p>
-            <a:pPr algn="ctr">
-              <a:defRPr sz="900">
-                <a:solidFill>
-                  <a:srgbClr val="555555"/>
-                </a:solidFill>
-              </a:defRPr>
-            </a:pPr>
-            <a:r>
-              <a:t>成功上线</a:t>
-            </a:r>
-          </a:p>
-        </p:txBody>
-      </p:sp>
-      <p:sp>
-        <p:nvSpPr>
-          <p:cNvPr id="37" name="TextBox 36"/>
-          <p:cNvSpPr txBox="1"/>
-          <p:nvPr/>
-        </p:nvSpPr>
-        <p:spPr>
-          <a:xfrm>
-            <a:off x="6217920" y="5349240"/>
-            <a:ext cx="2743200" cy="365760"/>
-          </a:xfrm>
-          <a:prstGeom prst="rect">
-            <a:avLst/>
-          </a:prstGeom>
-          <a:noFill/>
-        </p:spPr>
-        <p:txBody>
-          <a:bodyPr wrap="none">
-            <a:spAutoFit/>
-          </a:bodyPr>
-          <a:lstStyle/>
-          <a:p>
-            <a:pPr algn="ctr">
-              <a:defRPr sz="900" b="1"/>
-            </a:pPr>
-            <a:r>
-              <a:t>AI生成过程</a:t>
-            </a:r>
-          </a:p>
-          <a:p>
-            <a:r>
-              <a:t>(Claude Code)</a:t>
-            </a:r>
-          </a:p>
-        </p:txBody>
-      </p:sp>
-      <p:sp>
-        <p:nvSpPr>
-          <p:cNvPr id="38" name="TextBox 37"/>
-          <p:cNvSpPr txBox="1"/>
-          <p:nvPr/>
-        </p:nvSpPr>
-        <p:spPr>
-          <a:xfrm>
-            <a:off x="8961120" y="3520440"/>
-            <a:ext cx="2743200" cy="365760"/>
-          </a:xfrm>
-          <a:prstGeom prst="rect">
-            <a:avLst/>
-          </a:prstGeom>
-          <a:noFill/>
-        </p:spPr>
-        <p:txBody>
-          <a:bodyPr wrap="none">
-            <a:spAutoFit/>
-          </a:bodyPr>
-          <a:lstStyle/>
-          <a:p>
-            <a:pPr algn="ctr">
-              <a:defRPr sz="1000" b="1"/>
-            </a:pPr>
-            <a:r>
-              <a:t>理想过程 / 人工修复</a:t>
-            </a:r>
-          </a:p>
-          <a:p>
-            <a:r>
-              <a:t>(Contrast)</a:t>
-            </a:r>
-          </a:p>
-        </p:txBody>
-      </p:sp>
-      <p:sp>
-        <p:nvSpPr>
-          <p:cNvPr id="39" name="Trapezoid 38"/>
-          <p:cNvSpPr/>
-          <p:nvPr/>
-        </p:nvSpPr>
-        <p:spPr>
-          <a:xfrm rot="10800000">
-            <a:off x="9418320" y="3931920"/>
-            <a:ext cx="1828800" cy="320040"/>
-          </a:xfrm>
-          <a:prstGeom prst="trapezoid">
-            <a:avLst/>
-          </a:prstGeom>
-          <a:solidFill>
-            <a:srgbClr val="285296"/>
-          </a:solidFill>
-          <a:ln>
-            <a:noFill/>
+          <a:ln w="12700">
+            <a:solidFill>
+              <a:srgbClr val="FFFFFF"/>
+            </a:solidFill>
           </a:ln>
         </p:spPr>
         <p:style>
@@ -4794,27 +4372,27 @@
               </a:defRPr>
             </a:pPr>
             <a:r>
-              <a:t>需求输入</a:t>
-            </a:r>
-          </a:p>
-        </p:txBody>
-      </p:sp>
-      <p:sp>
-        <p:nvSpPr>
-          <p:cNvPr id="40" name="Trapezoid 39"/>
+              <a:t>虚构: VALID_DATE_FROM</a:t>
+            </a:r>
+          </a:p>
+        </p:txBody>
+      </p:sp>
+      <p:sp>
+        <p:nvSpPr>
+          <p:cNvPr id="34" name="Right Arrow 33"/>
           <p:cNvSpPr/>
           <p:nvPr/>
         </p:nvSpPr>
         <p:spPr>
-          <a:xfrm rot="10800000">
-            <a:off x="9646920" y="4297680"/>
-            <a:ext cx="1371600" cy="320040"/>
-          </a:xfrm>
-          <a:prstGeom prst="trapezoid">
+          <a:xfrm>
+            <a:off x="8869680" y="3291840"/>
+            <a:ext cx="228600" cy="365760"/>
+          </a:xfrm>
+          <a:prstGeom prst="rightArrow">
             <a:avLst/>
           </a:prstGeom>
           <a:solidFill>
-            <a:srgbClr val="459E97"/>
+            <a:srgbClr val="C13C3D"/>
           </a:solidFill>
           <a:ln>
             <a:noFill/>
@@ -4838,167 +4416,675 @@
           <a:bodyPr rtlCol="0" anchor="ctr"/>
           <a:lstStyle/>
           <a:p>
+            <a:pPr algn="ctr"/>
+          </a:p>
+        </p:txBody>
+      </p:sp>
+      <p:sp>
+        <p:nvSpPr>
+          <p:cNvPr id="35" name="Rectangle 34"/>
+          <p:cNvSpPr/>
+          <p:nvPr/>
+        </p:nvSpPr>
+        <p:spPr>
+          <a:xfrm>
+            <a:off x="9144000" y="2468880"/>
+            <a:ext cx="2286000" cy="2011680"/>
+          </a:xfrm>
+          <a:prstGeom prst="rect">
+            <a:avLst/>
+          </a:prstGeom>
+          <a:solidFill>
+            <a:srgbClr val="C13C3D"/>
+          </a:solidFill>
+          <a:ln>
+            <a:noFill/>
+          </a:ln>
+        </p:spPr>
+        <p:style>
+          <a:lnRef idx="1">
+            <a:schemeClr val="accent1"/>
+          </a:lnRef>
+          <a:fillRef idx="3">
+            <a:schemeClr val="accent1"/>
+          </a:fillRef>
+          <a:effectRef idx="2">
+            <a:schemeClr val="accent1"/>
+          </a:effectRef>
+          <a:fontRef idx="minor">
+            <a:schemeClr val="lt1"/>
+          </a:fontRef>
+        </p:style>
+        <p:txBody>
+          <a:bodyPr rtlCol="0" anchor="ctr"/>
+          <a:lstStyle/>
+          <a:p>
+            <a:pPr algn="ctr"/>
+          </a:p>
+        </p:txBody>
+      </p:sp>
+      <p:sp>
+        <p:nvSpPr>
+          <p:cNvPr id="36" name="Rectangle 35"/>
+          <p:cNvSpPr/>
+          <p:nvPr/>
+        </p:nvSpPr>
+        <p:spPr>
+          <a:xfrm>
+            <a:off x="9144000" y="2971800"/>
+            <a:ext cx="2286000" cy="12700"/>
+          </a:xfrm>
+          <a:prstGeom prst="rect">
+            <a:avLst/>
+          </a:prstGeom>
+          <a:ln w="19050">
+            <a:solidFill>
+              <a:srgbClr val="FFFFFF"/>
+            </a:solidFill>
+          </a:ln>
+        </p:spPr>
+        <p:style>
+          <a:lnRef idx="1">
+            <a:schemeClr val="accent1"/>
+          </a:lnRef>
+          <a:fillRef idx="3">
+            <a:schemeClr val="accent1"/>
+          </a:fillRef>
+          <a:effectRef idx="2">
+            <a:schemeClr val="accent1"/>
+          </a:effectRef>
+          <a:fontRef idx="minor">
+            <a:schemeClr val="lt1"/>
+          </a:fontRef>
+        </p:style>
+        <p:txBody>
+          <a:bodyPr rtlCol="0" anchor="ctr"/>
+          <a:lstStyle/>
+          <a:p>
+            <a:pPr algn="ctr"/>
+          </a:p>
+        </p:txBody>
+      </p:sp>
+      <p:sp>
+        <p:nvSpPr>
+          <p:cNvPr id="37" name="Rectangle 36"/>
+          <p:cNvSpPr/>
+          <p:nvPr/>
+        </p:nvSpPr>
+        <p:spPr>
+          <a:xfrm>
+            <a:off x="9144000" y="3474720"/>
+            <a:ext cx="2286000" cy="12700"/>
+          </a:xfrm>
+          <a:prstGeom prst="rect">
+            <a:avLst/>
+          </a:prstGeom>
+          <a:ln w="19050">
+            <a:solidFill>
+              <a:srgbClr val="FFFFFF"/>
+            </a:solidFill>
+          </a:ln>
+        </p:spPr>
+        <p:style>
+          <a:lnRef idx="1">
+            <a:schemeClr val="accent1"/>
+          </a:lnRef>
+          <a:fillRef idx="3">
+            <a:schemeClr val="accent1"/>
+          </a:fillRef>
+          <a:effectRef idx="2">
+            <a:schemeClr val="accent1"/>
+          </a:effectRef>
+          <a:fontRef idx="minor">
+            <a:schemeClr val="lt1"/>
+          </a:fontRef>
+        </p:style>
+        <p:txBody>
+          <a:bodyPr rtlCol="0" anchor="ctr"/>
+          <a:lstStyle/>
+          <a:p>
+            <a:pPr algn="ctr"/>
+          </a:p>
+        </p:txBody>
+      </p:sp>
+      <p:sp>
+        <p:nvSpPr>
+          <p:cNvPr id="38" name="Rectangle 37"/>
+          <p:cNvSpPr/>
+          <p:nvPr/>
+        </p:nvSpPr>
+        <p:spPr>
+          <a:xfrm>
+            <a:off x="9144000" y="3977640"/>
+            <a:ext cx="2286000" cy="12700"/>
+          </a:xfrm>
+          <a:prstGeom prst="rect">
+            <a:avLst/>
+          </a:prstGeom>
+          <a:ln w="19050">
+            <a:solidFill>
+              <a:srgbClr val="FFFFFF"/>
+            </a:solidFill>
+          </a:ln>
+        </p:spPr>
+        <p:style>
+          <a:lnRef idx="1">
+            <a:schemeClr val="accent1"/>
+          </a:lnRef>
+          <a:fillRef idx="3">
+            <a:schemeClr val="accent1"/>
+          </a:fillRef>
+          <a:effectRef idx="2">
+            <a:schemeClr val="accent1"/>
+          </a:effectRef>
+          <a:fontRef idx="minor">
+            <a:schemeClr val="lt1"/>
+          </a:fontRef>
+        </p:style>
+        <p:txBody>
+          <a:bodyPr rtlCol="0" anchor="ctr"/>
+          <a:lstStyle/>
+          <a:p>
+            <a:pPr algn="ctr"/>
+          </a:p>
+        </p:txBody>
+      </p:sp>
+      <p:sp>
+        <p:nvSpPr>
+          <p:cNvPr id="39" name="Rectangle 38"/>
+          <p:cNvSpPr/>
+          <p:nvPr/>
+        </p:nvSpPr>
+        <p:spPr>
+          <a:xfrm>
+            <a:off x="9715500" y="2468880"/>
+            <a:ext cx="12700" cy="502920"/>
+          </a:xfrm>
+          <a:prstGeom prst="rect">
+            <a:avLst/>
+          </a:prstGeom>
+          <a:ln>
+            <a:solidFill>
+              <a:srgbClr val="FFFFFF"/>
+            </a:solidFill>
+          </a:ln>
+        </p:spPr>
+        <p:style>
+          <a:lnRef idx="1">
+            <a:schemeClr val="accent1"/>
+          </a:lnRef>
+          <a:fillRef idx="3">
+            <a:schemeClr val="accent1"/>
+          </a:fillRef>
+          <a:effectRef idx="2">
+            <a:schemeClr val="accent1"/>
+          </a:effectRef>
+          <a:fontRef idx="minor">
+            <a:schemeClr val="lt1"/>
+          </a:fontRef>
+        </p:style>
+        <p:txBody>
+          <a:bodyPr rtlCol="0" anchor="ctr"/>
+          <a:lstStyle/>
+          <a:p>
+            <a:pPr algn="ctr"/>
+          </a:p>
+        </p:txBody>
+      </p:sp>
+      <p:sp>
+        <p:nvSpPr>
+          <p:cNvPr id="40" name="Rectangle 39"/>
+          <p:cNvSpPr/>
+          <p:nvPr/>
+        </p:nvSpPr>
+        <p:spPr>
+          <a:xfrm>
+            <a:off x="10287000" y="2468880"/>
+            <a:ext cx="12700" cy="502920"/>
+          </a:xfrm>
+          <a:prstGeom prst="rect">
+            <a:avLst/>
+          </a:prstGeom>
+          <a:ln>
+            <a:solidFill>
+              <a:srgbClr val="FFFFFF"/>
+            </a:solidFill>
+          </a:ln>
+        </p:spPr>
+        <p:style>
+          <a:lnRef idx="1">
+            <a:schemeClr val="accent1"/>
+          </a:lnRef>
+          <a:fillRef idx="3">
+            <a:schemeClr val="accent1"/>
+          </a:fillRef>
+          <a:effectRef idx="2">
+            <a:schemeClr val="accent1"/>
+          </a:effectRef>
+          <a:fontRef idx="minor">
+            <a:schemeClr val="lt1"/>
+          </a:fontRef>
+        </p:style>
+        <p:txBody>
+          <a:bodyPr rtlCol="0" anchor="ctr"/>
+          <a:lstStyle/>
+          <a:p>
+            <a:pPr algn="ctr"/>
+          </a:p>
+        </p:txBody>
+      </p:sp>
+      <p:sp>
+        <p:nvSpPr>
+          <p:cNvPr id="41" name="Rectangle 40"/>
+          <p:cNvSpPr/>
+          <p:nvPr/>
+        </p:nvSpPr>
+        <p:spPr>
+          <a:xfrm>
+            <a:off x="10858500" y="2468880"/>
+            <a:ext cx="12700" cy="502920"/>
+          </a:xfrm>
+          <a:prstGeom prst="rect">
+            <a:avLst/>
+          </a:prstGeom>
+          <a:ln>
+            <a:solidFill>
+              <a:srgbClr val="FFFFFF"/>
+            </a:solidFill>
+          </a:ln>
+        </p:spPr>
+        <p:style>
+          <a:lnRef idx="1">
+            <a:schemeClr val="accent1"/>
+          </a:lnRef>
+          <a:fillRef idx="3">
+            <a:schemeClr val="accent1"/>
+          </a:fillRef>
+          <a:effectRef idx="2">
+            <a:schemeClr val="accent1"/>
+          </a:effectRef>
+          <a:fontRef idx="minor">
+            <a:schemeClr val="lt1"/>
+          </a:fontRef>
+        </p:style>
+        <p:txBody>
+          <a:bodyPr rtlCol="0" anchor="ctr"/>
+          <a:lstStyle/>
+          <a:p>
+            <a:pPr algn="ctr"/>
+          </a:p>
+        </p:txBody>
+      </p:sp>
+      <p:sp>
+        <p:nvSpPr>
+          <p:cNvPr id="42" name="Rectangle 41"/>
+          <p:cNvSpPr/>
+          <p:nvPr/>
+        </p:nvSpPr>
+        <p:spPr>
+          <a:xfrm>
+            <a:off x="9898380" y="2971800"/>
+            <a:ext cx="12700" cy="502920"/>
+          </a:xfrm>
+          <a:prstGeom prst="rect">
+            <a:avLst/>
+          </a:prstGeom>
+          <a:ln>
+            <a:solidFill>
+              <a:srgbClr val="FFFFFF"/>
+            </a:solidFill>
+          </a:ln>
+        </p:spPr>
+        <p:style>
+          <a:lnRef idx="1">
+            <a:schemeClr val="accent1"/>
+          </a:lnRef>
+          <a:fillRef idx="3">
+            <a:schemeClr val="accent1"/>
+          </a:fillRef>
+          <a:effectRef idx="2">
+            <a:schemeClr val="accent1"/>
+          </a:effectRef>
+          <a:fontRef idx="minor">
+            <a:schemeClr val="lt1"/>
+          </a:fontRef>
+        </p:style>
+        <p:txBody>
+          <a:bodyPr rtlCol="0" anchor="ctr"/>
+          <a:lstStyle/>
+          <a:p>
+            <a:pPr algn="ctr"/>
+          </a:p>
+        </p:txBody>
+      </p:sp>
+      <p:sp>
+        <p:nvSpPr>
+          <p:cNvPr id="43" name="Rectangle 42"/>
+          <p:cNvSpPr/>
+          <p:nvPr/>
+        </p:nvSpPr>
+        <p:spPr>
+          <a:xfrm>
+            <a:off x="10652760" y="2971800"/>
+            <a:ext cx="12700" cy="502920"/>
+          </a:xfrm>
+          <a:prstGeom prst="rect">
+            <a:avLst/>
+          </a:prstGeom>
+          <a:ln>
+            <a:solidFill>
+              <a:srgbClr val="FFFFFF"/>
+            </a:solidFill>
+          </a:ln>
+        </p:spPr>
+        <p:style>
+          <a:lnRef idx="1">
+            <a:schemeClr val="accent1"/>
+          </a:lnRef>
+          <a:fillRef idx="3">
+            <a:schemeClr val="accent1"/>
+          </a:fillRef>
+          <a:effectRef idx="2">
+            <a:schemeClr val="accent1"/>
+          </a:effectRef>
+          <a:fontRef idx="minor">
+            <a:schemeClr val="lt1"/>
+          </a:fontRef>
+        </p:style>
+        <p:txBody>
+          <a:bodyPr rtlCol="0" anchor="ctr"/>
+          <a:lstStyle/>
+          <a:p>
+            <a:pPr algn="ctr"/>
+          </a:p>
+        </p:txBody>
+      </p:sp>
+      <p:sp>
+        <p:nvSpPr>
+          <p:cNvPr id="44" name="Rectangle 43"/>
+          <p:cNvSpPr/>
+          <p:nvPr/>
+        </p:nvSpPr>
+        <p:spPr>
+          <a:xfrm>
+            <a:off x="9715500" y="3474720"/>
+            <a:ext cx="12700" cy="502920"/>
+          </a:xfrm>
+          <a:prstGeom prst="rect">
+            <a:avLst/>
+          </a:prstGeom>
+          <a:ln>
+            <a:solidFill>
+              <a:srgbClr val="FFFFFF"/>
+            </a:solidFill>
+          </a:ln>
+        </p:spPr>
+        <p:style>
+          <a:lnRef idx="1">
+            <a:schemeClr val="accent1"/>
+          </a:lnRef>
+          <a:fillRef idx="3">
+            <a:schemeClr val="accent1"/>
+          </a:fillRef>
+          <a:effectRef idx="2">
+            <a:schemeClr val="accent1"/>
+          </a:effectRef>
+          <a:fontRef idx="minor">
+            <a:schemeClr val="lt1"/>
+          </a:fontRef>
+        </p:style>
+        <p:txBody>
+          <a:bodyPr rtlCol="0" anchor="ctr"/>
+          <a:lstStyle/>
+          <a:p>
+            <a:pPr algn="ctr"/>
+          </a:p>
+        </p:txBody>
+      </p:sp>
+      <p:sp>
+        <p:nvSpPr>
+          <p:cNvPr id="45" name="Rectangle 44"/>
+          <p:cNvSpPr/>
+          <p:nvPr/>
+        </p:nvSpPr>
+        <p:spPr>
+          <a:xfrm>
+            <a:off x="10287000" y="3474720"/>
+            <a:ext cx="12700" cy="502920"/>
+          </a:xfrm>
+          <a:prstGeom prst="rect">
+            <a:avLst/>
+          </a:prstGeom>
+          <a:ln>
+            <a:solidFill>
+              <a:srgbClr val="FFFFFF"/>
+            </a:solidFill>
+          </a:ln>
+        </p:spPr>
+        <p:style>
+          <a:lnRef idx="1">
+            <a:schemeClr val="accent1"/>
+          </a:lnRef>
+          <a:fillRef idx="3">
+            <a:schemeClr val="accent1"/>
+          </a:fillRef>
+          <a:effectRef idx="2">
+            <a:schemeClr val="accent1"/>
+          </a:effectRef>
+          <a:fontRef idx="minor">
+            <a:schemeClr val="lt1"/>
+          </a:fontRef>
+        </p:style>
+        <p:txBody>
+          <a:bodyPr rtlCol="0" anchor="ctr"/>
+          <a:lstStyle/>
+          <a:p>
+            <a:pPr algn="ctr"/>
+          </a:p>
+        </p:txBody>
+      </p:sp>
+      <p:sp>
+        <p:nvSpPr>
+          <p:cNvPr id="46" name="Rectangle 45"/>
+          <p:cNvSpPr/>
+          <p:nvPr/>
+        </p:nvSpPr>
+        <p:spPr>
+          <a:xfrm>
+            <a:off x="10858500" y="3474720"/>
+            <a:ext cx="12700" cy="502920"/>
+          </a:xfrm>
+          <a:prstGeom prst="rect">
+            <a:avLst/>
+          </a:prstGeom>
+          <a:ln>
+            <a:solidFill>
+              <a:srgbClr val="FFFFFF"/>
+            </a:solidFill>
+          </a:ln>
+        </p:spPr>
+        <p:style>
+          <a:lnRef idx="1">
+            <a:schemeClr val="accent1"/>
+          </a:lnRef>
+          <a:fillRef idx="3">
+            <a:schemeClr val="accent1"/>
+          </a:fillRef>
+          <a:effectRef idx="2">
+            <a:schemeClr val="accent1"/>
+          </a:effectRef>
+          <a:fontRef idx="minor">
+            <a:schemeClr val="lt1"/>
+          </a:fontRef>
+        </p:style>
+        <p:txBody>
+          <a:bodyPr rtlCol="0" anchor="ctr"/>
+          <a:lstStyle/>
+          <a:p>
+            <a:pPr algn="ctr"/>
+          </a:p>
+        </p:txBody>
+      </p:sp>
+      <p:sp>
+        <p:nvSpPr>
+          <p:cNvPr id="47" name="Rectangle 46"/>
+          <p:cNvSpPr/>
+          <p:nvPr/>
+        </p:nvSpPr>
+        <p:spPr>
+          <a:xfrm>
+            <a:off x="9898380" y="3977640"/>
+            <a:ext cx="12700" cy="502920"/>
+          </a:xfrm>
+          <a:prstGeom prst="rect">
+            <a:avLst/>
+          </a:prstGeom>
+          <a:ln>
+            <a:solidFill>
+              <a:srgbClr val="FFFFFF"/>
+            </a:solidFill>
+          </a:ln>
+        </p:spPr>
+        <p:style>
+          <a:lnRef idx="1">
+            <a:schemeClr val="accent1"/>
+          </a:lnRef>
+          <a:fillRef idx="3">
+            <a:schemeClr val="accent1"/>
+          </a:fillRef>
+          <a:effectRef idx="2">
+            <a:schemeClr val="accent1"/>
+          </a:effectRef>
+          <a:fontRef idx="minor">
+            <a:schemeClr val="lt1"/>
+          </a:fontRef>
+        </p:style>
+        <p:txBody>
+          <a:bodyPr rtlCol="0" anchor="ctr"/>
+          <a:lstStyle/>
+          <a:p>
+            <a:pPr algn="ctr"/>
+          </a:p>
+        </p:txBody>
+      </p:sp>
+      <p:sp>
+        <p:nvSpPr>
+          <p:cNvPr id="48" name="Rectangle 47"/>
+          <p:cNvSpPr/>
+          <p:nvPr/>
+        </p:nvSpPr>
+        <p:spPr>
+          <a:xfrm>
+            <a:off x="10652760" y="3977640"/>
+            <a:ext cx="12700" cy="502920"/>
+          </a:xfrm>
+          <a:prstGeom prst="rect">
+            <a:avLst/>
+          </a:prstGeom>
+          <a:ln>
+            <a:solidFill>
+              <a:srgbClr val="FFFFFF"/>
+            </a:solidFill>
+          </a:ln>
+        </p:spPr>
+        <p:style>
+          <a:lnRef idx="1">
+            <a:schemeClr val="accent1"/>
+          </a:lnRef>
+          <a:fillRef idx="3">
+            <a:schemeClr val="accent1"/>
+          </a:fillRef>
+          <a:effectRef idx="2">
+            <a:schemeClr val="accent1"/>
+          </a:effectRef>
+          <a:fontRef idx="minor">
+            <a:schemeClr val="lt1"/>
+          </a:fontRef>
+        </p:style>
+        <p:txBody>
+          <a:bodyPr rtlCol="0" anchor="ctr"/>
+          <a:lstStyle/>
+          <a:p>
+            <a:pPr algn="ctr"/>
+          </a:p>
+        </p:txBody>
+      </p:sp>
+      <p:sp>
+        <p:nvSpPr>
+          <p:cNvPr id="49" name="Rectangle 48"/>
+          <p:cNvSpPr/>
+          <p:nvPr/>
+        </p:nvSpPr>
+        <p:spPr>
+          <a:xfrm>
+            <a:off x="9326880" y="2834640"/>
+            <a:ext cx="1920240" cy="1280160"/>
+          </a:xfrm>
+          <a:prstGeom prst="rect">
+            <a:avLst/>
+          </a:prstGeom>
+          <a:solidFill>
+            <a:srgbClr val="9E2A2B"/>
+          </a:solidFill>
+          <a:ln w="19050">
+            <a:solidFill>
+              <a:srgbClr val="FFFFFF"/>
+            </a:solidFill>
+          </a:ln>
+        </p:spPr>
+        <p:style>
+          <a:lnRef idx="1">
+            <a:schemeClr val="accent1"/>
+          </a:lnRef>
+          <a:fillRef idx="3">
+            <a:schemeClr val="accent1"/>
+          </a:fillRef>
+          <a:effectRef idx="2">
+            <a:schemeClr val="accent1"/>
+          </a:effectRef>
+          <a:fontRef idx="minor">
+            <a:schemeClr val="lt1"/>
+          </a:fontRef>
+        </p:style>
+        <p:txBody>
+          <a:bodyPr rtlCol="0" anchor="ctr"/>
+          <a:lstStyle/>
+          <a:p>
             <a:pPr algn="ctr">
-              <a:defRPr sz="1000">
+              <a:defRPr sz="1600" b="1">
                 <a:solidFill>
                   <a:srgbClr val="FFFFFF"/>
                 </a:solidFill>
               </a:defRPr>
             </a:pPr>
             <a:r>
-              <a:t>人工/高质量代码</a:t>
-            </a:r>
-          </a:p>
-        </p:txBody>
-      </p:sp>
-      <p:sp>
-        <p:nvSpPr>
-          <p:cNvPr id="41" name="Trapezoid 40"/>
-          <p:cNvSpPr/>
-          <p:nvPr/>
-        </p:nvSpPr>
-        <p:spPr>
-          <a:xfrm rot="10800000">
-            <a:off x="9875520" y="4663440"/>
-            <a:ext cx="914400" cy="320040"/>
-          </a:xfrm>
-          <a:prstGeom prst="trapezoid">
-            <a:avLst/>
-          </a:prstGeom>
-          <a:solidFill>
-            <a:srgbClr val="43A047"/>
-          </a:solidFill>
-          <a:ln>
-            <a:noFill/>
-          </a:ln>
-        </p:spPr>
-        <p:style>
-          <a:lnRef idx="1">
-            <a:schemeClr val="accent1"/>
-          </a:lnRef>
-          <a:fillRef idx="3">
-            <a:schemeClr val="accent1"/>
-          </a:fillRef>
-          <a:effectRef idx="2">
-            <a:schemeClr val="accent1"/>
-          </a:effectRef>
-          <a:fontRef idx="minor">
-            <a:schemeClr val="lt1"/>
-          </a:fontRef>
-        </p:style>
-        <p:txBody>
-          <a:bodyPr rtlCol="0" anchor="ctr"/>
-          <a:lstStyle/>
+              <a:t>连锁语法错误</a:t>
+            </a:r>
+          </a:p>
           <a:p>
             <a:pPr algn="ctr">
-              <a:defRPr sz="1000">
+              <a:defRPr sz="1600" b="1">
                 <a:solidFill>
                   <a:srgbClr val="FFFFFF"/>
                 </a:solidFill>
               </a:defRPr>
             </a:pPr>
             <a:r>
-              <a:t>成功上线</a:t>
-            </a:r>
-          </a:p>
-        </p:txBody>
-      </p:sp>
-      <p:sp>
-        <p:nvSpPr>
-          <p:cNvPr id="42" name="Up Arrow 41"/>
-          <p:cNvSpPr/>
-          <p:nvPr/>
-        </p:nvSpPr>
-        <p:spPr>
-          <a:xfrm>
-            <a:off x="11430000" y="3931920"/>
-            <a:ext cx="137160" cy="1097280"/>
-          </a:xfrm>
-          <a:prstGeom prst="upArrow">
-            <a:avLst/>
-          </a:prstGeom>
-          <a:solidFill>
-            <a:srgbClr val="43A047"/>
-          </a:solidFill>
-          <a:ln>
-            <a:noFill/>
-          </a:ln>
-        </p:spPr>
-        <p:style>
-          <a:lnRef idx="1">
-            <a:schemeClr val="accent1"/>
-          </a:lnRef>
-          <a:fillRef idx="3">
-            <a:schemeClr val="accent1"/>
-          </a:fillRef>
-          <a:effectRef idx="2">
-            <a:schemeClr val="accent1"/>
-          </a:effectRef>
-          <a:fontRef idx="minor">
-            <a:schemeClr val="lt1"/>
-          </a:fontRef>
-        </p:style>
-        <p:txBody>
-          <a:bodyPr rtlCol="0" anchor="ctr"/>
-          <a:lstStyle/>
-          <a:p>
-            <a:pPr algn="ctr"/>
-          </a:p>
-        </p:txBody>
-      </p:sp>
-      <p:sp>
-        <p:nvSpPr>
-          <p:cNvPr id="43" name="Oval 42"/>
-          <p:cNvSpPr/>
-          <p:nvPr/>
-        </p:nvSpPr>
-        <p:spPr>
-          <a:xfrm>
-            <a:off x="11361420" y="5074920"/>
-            <a:ext cx="274320" cy="274320"/>
-          </a:xfrm>
-          <a:prstGeom prst="ellipse">
-            <a:avLst/>
-          </a:prstGeom>
-          <a:solidFill>
-            <a:srgbClr val="43A047"/>
-          </a:solidFill>
-          <a:ln>
-            <a:noFill/>
-          </a:ln>
-        </p:spPr>
-        <p:style>
-          <a:lnRef idx="1">
-            <a:schemeClr val="accent1"/>
-          </a:lnRef>
-          <a:fillRef idx="3">
-            <a:schemeClr val="accent1"/>
-          </a:fillRef>
-          <a:effectRef idx="2">
-            <a:schemeClr val="accent1"/>
-          </a:effectRef>
-          <a:fontRef idx="minor">
-            <a:schemeClr val="lt1"/>
-          </a:fontRef>
-        </p:style>
-        <p:txBody>
-          <a:bodyPr rtlCol="0" anchor="ctr"/>
-          <a:lstStyle/>
-          <a:p>
-            <a:pPr algn="ctr"/>
-          </a:p>
-        </p:txBody>
-      </p:sp>
-      <p:sp>
-        <p:nvSpPr>
-          <p:cNvPr id="44" name="TextBox 43"/>
+              <a:t>(21个)</a:t>
+            </a:r>
+          </a:p>
+        </p:txBody>
+      </p:sp>
+      <p:sp>
+        <p:nvSpPr>
+          <p:cNvPr id="50" name="TextBox 49"/>
           <p:cNvSpPr txBox="1"/>
           <p:nvPr/>
         </p:nvSpPr>
         <p:spPr>
           <a:xfrm>
-            <a:off x="11361420" y="5029200"/>
-            <a:ext cx="274320" cy="274320"/>
+            <a:off x="5852160" y="4572000"/>
+            <a:ext cx="5760720" cy="365760"/>
           </a:xfrm>
           <a:prstGeom prst="rect">
             <a:avLst/>
@@ -5012,164 +5098,14 @@
           <a:lstStyle/>
           <a:p>
             <a:pPr algn="ctr">
-              <a:defRPr b="1">
+              <a:defRPr sz="1400">
                 <a:solidFill>
-                  <a:srgbClr val="FFFFFF"/>
+                  <a:srgbClr val="000000"/>
                 </a:solidFill>
               </a:defRPr>
             </a:pPr>
             <a:r>
-              <a:t>✓</a:t>
-            </a:r>
-          </a:p>
-        </p:txBody>
-      </p:sp>
-      <p:sp>
-        <p:nvSpPr>
-          <p:cNvPr id="45" name="TextBox 44"/>
-          <p:cNvSpPr txBox="1"/>
-          <p:nvPr/>
-        </p:nvSpPr>
-        <p:spPr>
-          <a:xfrm>
-            <a:off x="8961120" y="5349240"/>
-            <a:ext cx="2743200" cy="365760"/>
-          </a:xfrm>
-          <a:prstGeom prst="rect">
-            <a:avLst/>
-          </a:prstGeom>
-          <a:noFill/>
-        </p:spPr>
-        <p:txBody>
-          <a:bodyPr wrap="none">
-            <a:spAutoFit/>
-          </a:bodyPr>
-          <a:lstStyle/>
-          <a:p>
-            <a:pPr algn="ctr">
-              <a:defRPr sz="900" b="1"/>
-            </a:pPr>
-            <a:r>
-              <a:t>理想过程 / 人工修复</a:t>
-            </a:r>
-          </a:p>
-          <a:p>
-            <a:r>
-              <a:t>(Contrast)</a:t>
-            </a:r>
-          </a:p>
-        </p:txBody>
-      </p:sp>
-      <p:sp>
-        <p:nvSpPr>
-          <p:cNvPr id="46" name="Rounded Rectangle 45"/>
-          <p:cNvSpPr/>
-          <p:nvPr/>
-        </p:nvSpPr>
-        <p:spPr>
-          <a:xfrm>
-            <a:off x="6309360" y="5806440"/>
-            <a:ext cx="5303520" cy="594360"/>
-          </a:xfrm>
-          <a:prstGeom prst="roundRect">
-            <a:avLst/>
-          </a:prstGeom>
-          <a:solidFill>
-            <a:srgbClr val="E0F2F1"/>
-          </a:solidFill>
-          <a:ln>
-            <a:noFill/>
-          </a:ln>
-        </p:spPr>
-        <p:style>
-          <a:lnRef idx="1">
-            <a:schemeClr val="accent1"/>
-          </a:lnRef>
-          <a:fillRef idx="3">
-            <a:schemeClr val="accent1"/>
-          </a:fillRef>
-          <a:effectRef idx="2">
-            <a:schemeClr val="accent1"/>
-          </a:effectRef>
-          <a:fontRef idx="minor">
-            <a:schemeClr val="lt1"/>
-          </a:fontRef>
-        </p:style>
-        <p:txBody>
-          <a:bodyPr rtlCol="0" anchor="ctr"/>
-          <a:lstStyle/>
-          <a:p>
-            <a:pPr algn="ctr"/>
-          </a:p>
-        </p:txBody>
-      </p:sp>
-      <p:sp>
-        <p:nvSpPr>
-          <p:cNvPr id="47" name="TextBox 46"/>
-          <p:cNvSpPr txBox="1"/>
-          <p:nvPr/>
-        </p:nvSpPr>
-        <p:spPr>
-          <a:xfrm>
-            <a:off x="6309360" y="5806440"/>
-            <a:ext cx="5303520" cy="594360"/>
-          </a:xfrm>
-          <a:prstGeom prst="rect">
-            <a:avLst/>
-          </a:prstGeom>
-          <a:noFill/>
-        </p:spPr>
-        <p:txBody>
-          <a:bodyPr wrap="square">
-            <a:spAutoFit/>
-          </a:bodyPr>
-          <a:lstStyle/>
-          <a:p>
-            <a:pPr>
-              <a:defRPr sz="1100" b="1">
-                <a:solidFill>
-                  <a:srgbClr val="004D40"/>
-                </a:solidFill>
-                <a:latin typeface="Microsoft YaHei"/>
-              </a:defRPr>
-            </a:pPr>
-            <a:r>
-              <a:t>核心结论：AI 在数据字典和接口规范上的“幻觉”导致代码质量极低，修复成本远超预期，当前阶段不可直接用于复杂业务场景。</a:t>
-            </a:r>
-          </a:p>
-        </p:txBody>
-      </p:sp>
-      <p:sp>
-        <p:nvSpPr>
-          <p:cNvPr id="48" name="TextBox 47"/>
-          <p:cNvSpPr txBox="1"/>
-          <p:nvPr/>
-        </p:nvSpPr>
-        <p:spPr>
-          <a:xfrm>
-            <a:off x="10515600" y="6400800"/>
-            <a:ext cx="1371600" cy="365760"/>
-          </a:xfrm>
-          <a:prstGeom prst="rect">
-            <a:avLst/>
-          </a:prstGeom>
-          <a:noFill/>
-        </p:spPr>
-        <p:txBody>
-          <a:bodyPr wrap="none">
-            <a:spAutoFit/>
-          </a:bodyPr>
-          <a:lstStyle/>
-          <a:p>
-            <a:pPr>
-              <a:defRPr sz="1200">
-                <a:solidFill>
-                  <a:srgbClr val="555555"/>
-                </a:solidFill>
-              </a:defRPr>
-            </a:pPr>
-            <a:r>
-              <a:t>第2页，共4页</a:t>
+              <a:t>Claude Code 虚构了关键字段，引发 21 个连锁语法错误。</a:t>
             </a:r>
           </a:p>
         </p:txBody>
